--- a/exports/pptx/lessons/middle-module-15-project-implementation/day-07-build-2.pptx
+++ b/exports/pptx/lessons/middle-module-15-project-implementation/day-07-build-2.pptx
@@ -3534,6 +3534,252 @@
         </p:nvSpPr>
         <p:spPr>
           <a:xfrm>
+            <a:off x="406301" y="870942"/>
+            <a:ext cx="8498026" cy="213271"/>
+          </a:xfrm>
+          <a:prstGeom prst="rect">
+            <a:avLst/>
+          </a:prstGeom>
+          <a:noFill/>
+          <a:ln/>
+        </p:spPr>
+        <p:txBody>
+          <a:bodyPr wrap="square" lIns="0" tIns="0" rIns="0" bIns="0" rtlCol="0" anchor="t"/>
+          <a:lstStyle/>
+          <a:p>
+            <a:pPr algn="l" indent="0" marL="0">
+              <a:lnSpc>
+                <a:spcPts val="1680"/>
+              </a:lnSpc>
+              <a:spcBef>
+                <a:spcPts val="300"/>
+              </a:spcBef>
+              <a:spcAft>
+                <a:spcPts val="300"/>
+              </a:spcAft>
+              <a:buNone/>
+            </a:pPr>
+            <a:r>
+              <a:rPr lang="en-US" sz="1200" i="1" dirty="0">
+                <a:solidFill>
+                  <a:srgbClr val="1C2833"/>
+                </a:solidFill>
+                <a:latin typeface="Arial" pitchFamily="34" charset="0"/>
+                <a:ea typeface="Arial" pitchFamily="34" charset="-122"/>
+                <a:cs typeface="Arial" pitchFamily="34" charset="-120"/>
+              </a:rPr>
+              <a:t>Each row: Stuck on · Quick unblock.</a:t>
+            </a:r>
+            <a:endParaRPr lang="en-US" sz="1200" dirty="0"/>
+          </a:p>
+        </p:txBody>
+      </p:sp>
+      <p:sp>
+        <p:nvSpPr>
+          <p:cNvPr id="5" name="Text 3"/>
+          <p:cNvSpPr/>
+          <p:nvPr/>
+        </p:nvSpPr>
+        <p:spPr>
+          <a:xfrm>
+            <a:off x="634901" y="1173063"/>
+            <a:ext cx="8102798" cy="1013222"/>
+          </a:xfrm>
+          <a:prstGeom prst="rect">
+            <a:avLst/>
+          </a:prstGeom>
+          <a:noFill/>
+          <a:ln/>
+        </p:spPr>
+        <p:txBody>
+          <a:bodyPr wrap="square" lIns="0" tIns="0" rIns="0" bIns="0" rtlCol="0" anchor="t"/>
+          <a:lstStyle/>
+          <a:p>
+            <a:pPr algn="l" marL="342900" indent="-342900">
+              <a:lnSpc>
+                <a:spcPts val="1620"/>
+              </a:lnSpc>
+              <a:spcAft>
+                <a:spcPts val="300"/>
+              </a:spcAft>
+              <a:buSzPct val="100000"/>
+              <a:buChar char="•"/>
+            </a:pPr>
+            <a:r>
+              <a:rPr lang="en-US" sz="1200" b="1" dirty="0">
+                <a:solidFill>
+                  <a:srgbClr val="1C2833"/>
+                </a:solidFill>
+                <a:latin typeface="Arial" pitchFamily="34" charset="0"/>
+                <a:ea typeface="Arial" pitchFamily="34" charset="-122"/>
+                <a:cs typeface="Arial" pitchFamily="34" charset="-120"/>
+              </a:rPr>
+              <a:t>"It looks ugly"</a:t>
+            </a:r>
+            <a:pPr algn="l" indent="0" marL="0">
+              <a:lnSpc>
+                <a:spcPts val="1620"/>
+              </a:lnSpc>
+              <a:spcAft>
+                <a:spcPts val="300"/>
+              </a:spcAft>
+              <a:buNone/>
+            </a:pPr>
+            <a:r>
+              <a:rPr lang="en-US" sz="1200" dirty="0">
+                <a:solidFill>
+                  <a:srgbClr val="1C2833"/>
+                </a:solidFill>
+                <a:latin typeface="Arial" pitchFamily="34" charset="0"/>
+                <a:ea typeface="Arial" pitchFamily="34" charset="-122"/>
+                <a:cs typeface="Arial" pitchFamily="34" charset="-120"/>
+              </a:rPr>
+              <a:t> — Aesthetics are 1 line of the rubric, not 6. Move on.</a:t>
+            </a:r>
+            <a:endParaRPr lang="en-US" sz="1200" dirty="0"/>
+          </a:p>
+          <a:p>
+            <a:pPr algn="l" marL="342900" indent="-342900">
+              <a:lnSpc>
+                <a:spcPts val="1620"/>
+              </a:lnSpc>
+              <a:spcAft>
+                <a:spcPts val="300"/>
+              </a:spcAft>
+              <a:buSzPct val="100000"/>
+              <a:buChar char="•"/>
+            </a:pPr>
+            <a:r>
+              <a:rPr lang="en-US" sz="1200" b="1" dirty="0">
+                <a:solidFill>
+                  <a:srgbClr val="1C2833"/>
+                </a:solidFill>
+                <a:latin typeface="Arial" pitchFamily="34" charset="0"/>
+                <a:ea typeface="Arial" pitchFamily="34" charset="-122"/>
+                <a:cs typeface="Arial" pitchFamily="34" charset="-120"/>
+              </a:rPr>
+              <a:t>"I have too many citations on one page"</a:t>
+            </a:r>
+            <a:pPr algn="l" indent="0" marL="0">
+              <a:lnSpc>
+                <a:spcPts val="1620"/>
+              </a:lnSpc>
+              <a:spcAft>
+                <a:spcPts val="300"/>
+              </a:spcAft>
+              <a:buNone/>
+            </a:pPr>
+            <a:r>
+              <a:rPr lang="en-US" sz="1200" dirty="0">
+                <a:solidFill>
+                  <a:srgbClr val="1C2833"/>
+                </a:solidFill>
+                <a:latin typeface="Arial" pitchFamily="34" charset="0"/>
+                <a:ea typeface="Arial" pitchFamily="34" charset="-122"/>
+                <a:cs typeface="Arial" pitchFamily="34" charset="-120"/>
+              </a:rPr>
+              <a:t> — Footnote them; only the strongest one needs to be in the body.</a:t>
+            </a:r>
+            <a:endParaRPr lang="en-US" sz="1200" dirty="0"/>
+          </a:p>
+          <a:p>
+            <a:pPr algn="l" marL="342900" indent="-342900">
+              <a:lnSpc>
+                <a:spcPts val="1620"/>
+              </a:lnSpc>
+              <a:spcAft>
+                <a:spcPts val="300"/>
+              </a:spcAft>
+              <a:buSzPct val="100000"/>
+              <a:buChar char="•"/>
+            </a:pPr>
+            <a:r>
+              <a:rPr lang="en-US" sz="1200" b="1" dirty="0">
+                <a:solidFill>
+                  <a:srgbClr val="1C2833"/>
+                </a:solidFill>
+                <a:latin typeface="Arial" pitchFamily="34" charset="0"/>
+                <a:ea typeface="Arial" pitchFamily="34" charset="-122"/>
+                <a:cs typeface="Arial" pitchFamily="34" charset="-120"/>
+              </a:rPr>
+              <a:t>"My partner finished before me"</a:t>
+            </a:r>
+            <a:pPr algn="l" indent="0" marL="0">
+              <a:lnSpc>
+                <a:spcPts val="1620"/>
+              </a:lnSpc>
+              <a:spcAft>
+                <a:spcPts val="300"/>
+              </a:spcAft>
+              <a:buNone/>
+            </a:pPr>
+            <a:r>
+              <a:rPr lang="en-US" sz="1200" dirty="0">
+                <a:solidFill>
+                  <a:srgbClr val="1C2833"/>
+                </a:solidFill>
+                <a:latin typeface="Arial" pitchFamily="34" charset="0"/>
+                <a:ea typeface="Arial" pitchFamily="34" charset="-122"/>
+                <a:cs typeface="Arial" pitchFamily="34" charset="-120"/>
+              </a:rPr>
+              <a:t> — Re-divide. They help on the final 20% in a new role.</a:t>
+            </a:r>
+            <a:endParaRPr lang="en-US" sz="1200" dirty="0"/>
+          </a:p>
+          <a:p>
+            <a:pPr algn="l" marL="342900" indent="-342900">
+              <a:lnSpc>
+                <a:spcPts val="1620"/>
+              </a:lnSpc>
+              <a:spcAft>
+                <a:spcPts val="300"/>
+              </a:spcAft>
+              <a:buSzPct val="100000"/>
+              <a:buChar char="•"/>
+            </a:pPr>
+            <a:r>
+              <a:rPr lang="en-US" sz="1200" b="1" dirty="0">
+                <a:solidFill>
+                  <a:srgbClr val="1C2833"/>
+                </a:solidFill>
+                <a:latin typeface="Arial" pitchFamily="34" charset="0"/>
+                <a:ea typeface="Arial" pitchFamily="34" charset="-122"/>
+                <a:cs typeface="Arial" pitchFamily="34" charset="-120"/>
+              </a:rPr>
+              <a:t>"I want to redo it"</a:t>
+            </a:r>
+            <a:pPr algn="l" indent="0" marL="0">
+              <a:lnSpc>
+                <a:spcPts val="1620"/>
+              </a:lnSpc>
+              <a:spcAft>
+                <a:spcPts val="300"/>
+              </a:spcAft>
+              <a:buNone/>
+            </a:pPr>
+            <a:r>
+              <a:rPr lang="en-US" sz="1200" dirty="0">
+                <a:solidFill>
+                  <a:srgbClr val="1C2833"/>
+                </a:solidFill>
+                <a:latin typeface="Arial" pitchFamily="34" charset="0"/>
+                <a:ea typeface="Arial" pitchFamily="34" charset="-122"/>
+                <a:cs typeface="Arial" pitchFamily="34" charset="-120"/>
+              </a:rPr>
+              <a:t> — No. The rubric rewards iteration on what exists, not restarts.</a:t>
+            </a:r>
+            <a:endParaRPr lang="en-US" sz="1200" dirty="0"/>
+          </a:p>
+        </p:txBody>
+      </p:sp>
+      <p:sp>
+        <p:nvSpPr>
+          <p:cNvPr id="6" name="Text 4"/>
+          <p:cNvSpPr/>
+          <p:nvPr/>
+        </p:nvSpPr>
+        <p:spPr>
+          <a:xfrm>
             <a:off x="406301" y="4434929"/>
             <a:ext cx="8498026" cy="213271"/>
           </a:xfrm>

--- a/exports/pptx/lessons/middle-module-15-project-implementation/day-07-build-2.pptx
+++ b/exports/pptx/lessons/middle-module-15-project-implementation/day-07-build-2.pptx
@@ -19,9 +19,13 @@
     <p:sldId id="267" r:id="rId13"/>
     <p:sldId id="268" r:id="rId14"/>
     <p:sldId id="269" r:id="rId15"/>
+    <p:sldId id="270" r:id="rId16"/>
+    <p:sldId id="271" r:id="rId17"/>
+    <p:sldId id="272" r:id="rId18"/>
+    <p:sldId id="273" r:id="rId19"/>
   </p:sldIdLst>
   <p:notesMasterIdLst>
-    <p:notesMasterId r:id="rId16"/>
+    <p:notesMasterId r:id="rId20"/>
   </p:notesMasterIdLst>
   <p:sldSz cx="9144000" cy="5143500"/>
   <p:notesSz cx="5143500" cy="9144000"/>
@@ -979,6 +983,358 @@
             <a:fld id="{F7021451-1387-4CA6-816F-3879F97B5CBC}" type="slidenum">
               <a:rPr lang="en-US"/>
               <a:t>14</a:t>
+            </a:fld>
+            <a:endParaRPr lang="en-US"/>
+          </a:p>
+        </p:txBody>
+      </p:sp>
+    </p:spTree>
+    <p:extLst>
+      <p:ext uri="{BB962C8B-B14F-4D97-AF65-F5344CB8AC3E}">
+        <p14:creationId xmlns:p14="http://schemas.microsoft.com/office/powerpoint/2010/main" val="1024086991"/>
+      </p:ext>
+    </p:extLst>
+  </p:cSld>
+  <p:clrMapOvr>
+    <a:masterClrMapping/>
+  </p:clrMapOvr>
+</p:notes>
+</file>
+
+<file path=ppt/notesSlides/notesSlide15.xml><?xml version="1.0" encoding="utf-8"?>
+<p:notes xmlns:a="http://schemas.openxmlformats.org/drawingml/2006/main" xmlns:r="http://schemas.openxmlformats.org/officeDocument/2006/relationships" xmlns:p="http://schemas.openxmlformats.org/presentationml/2006/main">
+  <p:cSld>
+    <p:spTree>
+      <p:nvGrpSpPr>
+        <p:cNvPr id="1" name=""/>
+        <p:cNvGrpSpPr/>
+        <p:nvPr/>
+      </p:nvGrpSpPr>
+      <p:grpSpPr>
+        <a:xfrm>
+          <a:off x="0" y="0"/>
+          <a:ext cx="0" cy="0"/>
+          <a:chOff x="0" y="0"/>
+          <a:chExt cx="0" cy="0"/>
+        </a:xfrm>
+      </p:grpSpPr>
+      <p:sp>
+        <p:nvSpPr>
+          <p:cNvPr id="2" name="Slide Image Placeholder 1"/>
+          <p:cNvSpPr>
+            <a:spLocks noGrp="1" noRot="1" noChangeAspect="1"/>
+          </p:cNvSpPr>
+          <p:nvPr>
+            <p:ph type="sldImg"/>
+          </p:nvPr>
+        </p:nvSpPr>
+        <p:spPr/>
+      </p:sp>
+      <p:sp>
+        <p:nvSpPr>
+          <p:cNvPr id="3" name="Notes Placeholder 2"/>
+          <p:cNvSpPr>
+            <a:spLocks noGrp="1"/>
+          </p:cNvSpPr>
+          <p:nvPr>
+            <p:ph type="body" idx="1"/>
+          </p:nvPr>
+        </p:nvSpPr>
+        <p:spPr/>
+        <p:txBody>
+          <a:bodyPr/>
+          <a:lstStyle/>
+          <a:p>
+            <a:r>
+              <a:rPr lang="en-US" dirty="0"/>
+              <a:t/>
+            </a:r>
+            <a:endParaRPr lang="en-US" dirty="0"/>
+          </a:p>
+        </p:txBody>
+      </p:sp>
+      <p:sp>
+        <p:nvSpPr>
+          <p:cNvPr id="4" name="Slide Number Placeholder 3"/>
+          <p:cNvSpPr>
+            <a:spLocks noGrp="1"/>
+          </p:cNvSpPr>
+          <p:nvPr>
+            <p:ph type="sldNum" sz="quarter" idx="10"/>
+          </p:nvPr>
+        </p:nvSpPr>
+        <p:spPr/>
+        <p:txBody>
+          <a:bodyPr/>
+          <a:lstStyle/>
+          <a:p>
+            <a:fld id="{F7021451-1387-4CA6-816F-3879F97B5CBC}" type="slidenum">
+              <a:rPr lang="en-US"/>
+              <a:t>15</a:t>
+            </a:fld>
+            <a:endParaRPr lang="en-US"/>
+          </a:p>
+        </p:txBody>
+      </p:sp>
+    </p:spTree>
+    <p:extLst>
+      <p:ext uri="{BB962C8B-B14F-4D97-AF65-F5344CB8AC3E}">
+        <p14:creationId xmlns:p14="http://schemas.microsoft.com/office/powerpoint/2010/main" val="1024086991"/>
+      </p:ext>
+    </p:extLst>
+  </p:cSld>
+  <p:clrMapOvr>
+    <a:masterClrMapping/>
+  </p:clrMapOvr>
+</p:notes>
+</file>
+
+<file path=ppt/notesSlides/notesSlide16.xml><?xml version="1.0" encoding="utf-8"?>
+<p:notes xmlns:a="http://schemas.openxmlformats.org/drawingml/2006/main" xmlns:r="http://schemas.openxmlformats.org/officeDocument/2006/relationships" xmlns:p="http://schemas.openxmlformats.org/presentationml/2006/main">
+  <p:cSld>
+    <p:spTree>
+      <p:nvGrpSpPr>
+        <p:cNvPr id="1" name=""/>
+        <p:cNvGrpSpPr/>
+        <p:nvPr/>
+      </p:nvGrpSpPr>
+      <p:grpSpPr>
+        <a:xfrm>
+          <a:off x="0" y="0"/>
+          <a:ext cx="0" cy="0"/>
+          <a:chOff x="0" y="0"/>
+          <a:chExt cx="0" cy="0"/>
+        </a:xfrm>
+      </p:grpSpPr>
+      <p:sp>
+        <p:nvSpPr>
+          <p:cNvPr id="2" name="Slide Image Placeholder 1"/>
+          <p:cNvSpPr>
+            <a:spLocks noGrp="1" noRot="1" noChangeAspect="1"/>
+          </p:cNvSpPr>
+          <p:nvPr>
+            <p:ph type="sldImg"/>
+          </p:nvPr>
+        </p:nvSpPr>
+        <p:spPr/>
+      </p:sp>
+      <p:sp>
+        <p:nvSpPr>
+          <p:cNvPr id="3" name="Notes Placeholder 2"/>
+          <p:cNvSpPr>
+            <a:spLocks noGrp="1"/>
+          </p:cNvSpPr>
+          <p:nvPr>
+            <p:ph type="body" idx="1"/>
+          </p:nvPr>
+        </p:nvSpPr>
+        <p:spPr/>
+        <p:txBody>
+          <a:bodyPr/>
+          <a:lstStyle/>
+          <a:p>
+            <a:r>
+              <a:rPr lang="en-US" dirty="0"/>
+              <a:t/>
+            </a:r>
+            <a:endParaRPr lang="en-US" dirty="0"/>
+          </a:p>
+        </p:txBody>
+      </p:sp>
+      <p:sp>
+        <p:nvSpPr>
+          <p:cNvPr id="4" name="Slide Number Placeholder 3"/>
+          <p:cNvSpPr>
+            <a:spLocks noGrp="1"/>
+          </p:cNvSpPr>
+          <p:nvPr>
+            <p:ph type="sldNum" sz="quarter" idx="10"/>
+          </p:nvPr>
+        </p:nvSpPr>
+        <p:spPr/>
+        <p:txBody>
+          <a:bodyPr/>
+          <a:lstStyle/>
+          <a:p>
+            <a:fld id="{F7021451-1387-4CA6-816F-3879F97B5CBC}" type="slidenum">
+              <a:rPr lang="en-US"/>
+              <a:t>16</a:t>
+            </a:fld>
+            <a:endParaRPr lang="en-US"/>
+          </a:p>
+        </p:txBody>
+      </p:sp>
+    </p:spTree>
+    <p:extLst>
+      <p:ext uri="{BB962C8B-B14F-4D97-AF65-F5344CB8AC3E}">
+        <p14:creationId xmlns:p14="http://schemas.microsoft.com/office/powerpoint/2010/main" val="1024086991"/>
+      </p:ext>
+    </p:extLst>
+  </p:cSld>
+  <p:clrMapOvr>
+    <a:masterClrMapping/>
+  </p:clrMapOvr>
+</p:notes>
+</file>
+
+<file path=ppt/notesSlides/notesSlide17.xml><?xml version="1.0" encoding="utf-8"?>
+<p:notes xmlns:a="http://schemas.openxmlformats.org/drawingml/2006/main" xmlns:r="http://schemas.openxmlformats.org/officeDocument/2006/relationships" xmlns:p="http://schemas.openxmlformats.org/presentationml/2006/main">
+  <p:cSld>
+    <p:spTree>
+      <p:nvGrpSpPr>
+        <p:cNvPr id="1" name=""/>
+        <p:cNvGrpSpPr/>
+        <p:nvPr/>
+      </p:nvGrpSpPr>
+      <p:grpSpPr>
+        <a:xfrm>
+          <a:off x="0" y="0"/>
+          <a:ext cx="0" cy="0"/>
+          <a:chOff x="0" y="0"/>
+          <a:chExt cx="0" cy="0"/>
+        </a:xfrm>
+      </p:grpSpPr>
+      <p:sp>
+        <p:nvSpPr>
+          <p:cNvPr id="2" name="Slide Image Placeholder 1"/>
+          <p:cNvSpPr>
+            <a:spLocks noGrp="1" noRot="1" noChangeAspect="1"/>
+          </p:cNvSpPr>
+          <p:nvPr>
+            <p:ph type="sldImg"/>
+          </p:nvPr>
+        </p:nvSpPr>
+        <p:spPr/>
+      </p:sp>
+      <p:sp>
+        <p:nvSpPr>
+          <p:cNvPr id="3" name="Notes Placeholder 2"/>
+          <p:cNvSpPr>
+            <a:spLocks noGrp="1"/>
+          </p:cNvSpPr>
+          <p:nvPr>
+            <p:ph type="body" idx="1"/>
+          </p:nvPr>
+        </p:nvSpPr>
+        <p:spPr/>
+        <p:txBody>
+          <a:bodyPr/>
+          <a:lstStyle/>
+          <a:p>
+            <a:r>
+              <a:rPr lang="en-US" dirty="0"/>
+              <a:t/>
+            </a:r>
+            <a:endParaRPr lang="en-US" dirty="0"/>
+          </a:p>
+        </p:txBody>
+      </p:sp>
+      <p:sp>
+        <p:nvSpPr>
+          <p:cNvPr id="4" name="Slide Number Placeholder 3"/>
+          <p:cNvSpPr>
+            <a:spLocks noGrp="1"/>
+          </p:cNvSpPr>
+          <p:nvPr>
+            <p:ph type="sldNum" sz="quarter" idx="10"/>
+          </p:nvPr>
+        </p:nvSpPr>
+        <p:spPr/>
+        <p:txBody>
+          <a:bodyPr/>
+          <a:lstStyle/>
+          <a:p>
+            <a:fld id="{F7021451-1387-4CA6-816F-3879F97B5CBC}" type="slidenum">
+              <a:rPr lang="en-US"/>
+              <a:t>17</a:t>
+            </a:fld>
+            <a:endParaRPr lang="en-US"/>
+          </a:p>
+        </p:txBody>
+      </p:sp>
+    </p:spTree>
+    <p:extLst>
+      <p:ext uri="{BB962C8B-B14F-4D97-AF65-F5344CB8AC3E}">
+        <p14:creationId xmlns:p14="http://schemas.microsoft.com/office/powerpoint/2010/main" val="1024086991"/>
+      </p:ext>
+    </p:extLst>
+  </p:cSld>
+  <p:clrMapOvr>
+    <a:masterClrMapping/>
+  </p:clrMapOvr>
+</p:notes>
+</file>
+
+<file path=ppt/notesSlides/notesSlide18.xml><?xml version="1.0" encoding="utf-8"?>
+<p:notes xmlns:a="http://schemas.openxmlformats.org/drawingml/2006/main" xmlns:r="http://schemas.openxmlformats.org/officeDocument/2006/relationships" xmlns:p="http://schemas.openxmlformats.org/presentationml/2006/main">
+  <p:cSld>
+    <p:spTree>
+      <p:nvGrpSpPr>
+        <p:cNvPr id="1" name=""/>
+        <p:cNvGrpSpPr/>
+        <p:nvPr/>
+      </p:nvGrpSpPr>
+      <p:grpSpPr>
+        <a:xfrm>
+          <a:off x="0" y="0"/>
+          <a:ext cx="0" cy="0"/>
+          <a:chOff x="0" y="0"/>
+          <a:chExt cx="0" cy="0"/>
+        </a:xfrm>
+      </p:grpSpPr>
+      <p:sp>
+        <p:nvSpPr>
+          <p:cNvPr id="2" name="Slide Image Placeholder 1"/>
+          <p:cNvSpPr>
+            <a:spLocks noGrp="1" noRot="1" noChangeAspect="1"/>
+          </p:cNvSpPr>
+          <p:nvPr>
+            <p:ph type="sldImg"/>
+          </p:nvPr>
+        </p:nvSpPr>
+        <p:spPr/>
+      </p:sp>
+      <p:sp>
+        <p:nvSpPr>
+          <p:cNvPr id="3" name="Notes Placeholder 2"/>
+          <p:cNvSpPr>
+            <a:spLocks noGrp="1"/>
+          </p:cNvSpPr>
+          <p:nvPr>
+            <p:ph type="body" idx="1"/>
+          </p:nvPr>
+        </p:nvSpPr>
+        <p:spPr/>
+        <p:txBody>
+          <a:bodyPr/>
+          <a:lstStyle/>
+          <a:p>
+            <a:r>
+              <a:rPr lang="en-US" dirty="0"/>
+              <a:t/>
+            </a:r>
+            <a:endParaRPr lang="en-US" dirty="0"/>
+          </a:p>
+        </p:txBody>
+      </p:sp>
+      <p:sp>
+        <p:nvSpPr>
+          <p:cNvPr id="4" name="Slide Number Placeholder 3"/>
+          <p:cNvSpPr>
+            <a:spLocks noGrp="1"/>
+          </p:cNvSpPr>
+          <p:nvPr>
+            <p:ph type="sldNum" sz="quarter" idx="10"/>
+          </p:nvPr>
+        </p:nvSpPr>
+        <p:spPr/>
+        <p:txBody>
+          <a:bodyPr/>
+          <a:lstStyle/>
+          <a:p>
+            <a:fld id="{F7021451-1387-4CA6-816F-3879F97B5CBC}" type="slidenum">
+              <a:rPr lang="en-US"/>
+              <a:t>18</a:t>
             </a:fld>
             <a:endParaRPr lang="en-US"/>
           </a:p>
@@ -2278,148 +2634,6 @@
         </p:nvSpPr>
         <p:spPr>
           <a:xfrm>
-            <a:off x="406301" y="1223963"/>
-            <a:ext cx="8498026" cy="274290"/>
-          </a:xfrm>
-          <a:prstGeom prst="rect">
-            <a:avLst/>
-          </a:prstGeom>
-          <a:noFill/>
-          <a:ln/>
-        </p:spPr>
-        <p:txBody>
-          <a:bodyPr wrap="square" lIns="0" tIns="0" rIns="0" bIns="0" rtlCol="0" anchor="t"/>
-          <a:lstStyle/>
-          <a:p>
-            <a:pPr algn="l" indent="0" marL="0">
-              <a:lnSpc>
-                <a:spcPts val="2160"/>
-              </a:lnSpc>
-              <a:spcBef>
-                <a:spcPts val="600"/>
-              </a:spcBef>
-              <a:spcAft>
-                <a:spcPts val="800"/>
-              </a:spcAft>
-              <a:buNone/>
-            </a:pPr>
-            <a:r>
-              <a:rPr lang="en-US" sz="1800" b="1" dirty="0">
-                <a:solidFill>
-                  <a:srgbClr val="FE4447"/>
-                </a:solidFill>
-                <a:latin typeface="Georgia" pitchFamily="34" charset="0"/>
-                <a:ea typeface="Georgia" pitchFamily="34" charset="-122"/>
-                <a:cs typeface="Georgia" pitchFamily="34" charset="-120"/>
-              </a:rPr>
-              <a:t>Learning objective</a:t>
-            </a:r>
-            <a:endParaRPr lang="en-US" sz="1800" dirty="0"/>
-          </a:p>
-        </p:txBody>
-      </p:sp>
-      <p:sp>
-        <p:nvSpPr>
-          <p:cNvPr id="6" name="Text 4"/>
-          <p:cNvSpPr/>
-          <p:nvPr/>
-        </p:nvSpPr>
-        <p:spPr>
-          <a:xfrm>
-            <a:off x="406301" y="1637854"/>
-            <a:ext cx="8498026" cy="426541"/>
-          </a:xfrm>
-          <a:prstGeom prst="rect">
-            <a:avLst/>
-          </a:prstGeom>
-          <a:noFill/>
-          <a:ln/>
-        </p:spPr>
-        <p:txBody>
-          <a:bodyPr wrap="square" lIns="0" tIns="0" rIns="0" bIns="0" rtlCol="0" anchor="t"/>
-          <a:lstStyle/>
-          <a:p>
-            <a:pPr algn="l" indent="0" marL="0">
-              <a:lnSpc>
-                <a:spcPts val="1680"/>
-              </a:lnSpc>
-              <a:spcBef>
-                <a:spcPts val="300"/>
-              </a:spcBef>
-              <a:spcAft>
-                <a:spcPts val="300"/>
-              </a:spcAft>
-              <a:buNone/>
-            </a:pPr>
-            <a:r>
-              <a:rPr lang="en-US" sz="1200" dirty="0">
-                <a:solidFill>
-                  <a:srgbClr val="1C2833"/>
-                </a:solidFill>
-                <a:latin typeface="Arial" pitchFamily="34" charset="0"/>
-                <a:ea typeface="Arial" pitchFamily="34" charset="-122"/>
-                <a:cs typeface="Arial" pitchFamily="34" charset="-120"/>
-              </a:rPr>
-              <a:t>By the end of this lesson, students will have a </a:t>
-            </a:r>
-            <a:pPr algn="l" indent="0" marL="0">
-              <a:lnSpc>
-                <a:spcPts val="1680"/>
-              </a:lnSpc>
-              <a:spcBef>
-                <a:spcPts val="300"/>
-              </a:spcBef>
-              <a:spcAft>
-                <a:spcPts val="300"/>
-              </a:spcAft>
-              <a:buNone/>
-            </a:pPr>
-            <a:r>
-              <a:rPr lang="en-US" sz="1200" b="1" dirty="0">
-                <a:solidFill>
-                  <a:srgbClr val="1C2833"/>
-                </a:solidFill>
-                <a:latin typeface="Arial" pitchFamily="34" charset="0"/>
-                <a:ea typeface="Arial" pitchFamily="34" charset="-122"/>
-                <a:cs typeface="Arial" pitchFamily="34" charset="-120"/>
-              </a:rPr>
-              <a:t>substantially complete</a:t>
-            </a:r>
-            <a:pPr algn="l" indent="0" marL="0">
-              <a:lnSpc>
-                <a:spcPts val="1680"/>
-              </a:lnSpc>
-              <a:spcBef>
-                <a:spcPts val="300"/>
-              </a:spcBef>
-              <a:spcAft>
-                <a:spcPts val="300"/>
-              </a:spcAft>
-              <a:buNone/>
-            </a:pPr>
-            <a:r>
-              <a:rPr lang="en-US" sz="1200" dirty="0">
-                <a:solidFill>
-                  <a:srgbClr val="1C2833"/>
-                </a:solidFill>
-                <a:latin typeface="Arial" pitchFamily="34" charset="0"/>
-                <a:ea typeface="Arial" pitchFamily="34" charset="-122"/>
-                <a:cs typeface="Arial" pitchFamily="34" charset="-120"/>
-              </a:rPr>
-              <a:t> final artefact — at least 80% finished, with only refinements (not rewrites) remaining for the documentation and rehearsal days.</a:t>
-            </a:r>
-            <a:endParaRPr lang="en-US" sz="1200" dirty="0"/>
-          </a:p>
-        </p:txBody>
-      </p:sp>
-      <p:sp>
-        <p:nvSpPr>
-          <p:cNvPr id="7" name="Text 5"/>
-          <p:cNvSpPr/>
-          <p:nvPr/>
-        </p:nvSpPr>
-        <p:spPr>
-          <a:xfrm>
             <a:off x="406301" y="4434929"/>
             <a:ext cx="8498026" cy="213271"/>
           </a:xfrm>
@@ -2564,7 +2778,7 @@
                 <a:ea typeface="Georgia" pitchFamily="34" charset="-122"/>
                 <a:cs typeface="Georgia" pitchFamily="34" charset="-120"/>
               </a:rPr>
-              <a:t>Homework</a:t>
+              <a:t>Wrap-up (7 min)</a:t>
             </a:r>
             <a:endParaRPr lang="en-US" sz="1800" dirty="0"/>
           </a:p>
@@ -2578,8 +2792,8 @@
         </p:nvSpPr>
         <p:spPr>
           <a:xfrm>
-            <a:off x="406301" y="870942"/>
-            <a:ext cx="8498026" cy="639812"/>
+            <a:off x="634901" y="883593"/>
+            <a:ext cx="8102798" cy="525661"/>
           </a:xfrm>
           <a:prstGeom prst="rect">
             <a:avLst/>
@@ -2591,9 +2805,132 @@
           <a:bodyPr wrap="square" lIns="0" tIns="0" rIns="0" bIns="0" rtlCol="0" anchor="t"/>
           <a:lstStyle/>
           <a:p>
-            <a:pPr algn="l" indent="0" marL="0">
-              <a:lnSpc>
-                <a:spcPts val="1680"/>
+            <a:pPr algn="l" marL="342900" indent="-342900">
+              <a:lnSpc>
+                <a:spcPts val="1620"/>
+              </a:lnSpc>
+              <a:spcAft>
+                <a:spcPts val="300"/>
+              </a:spcAft>
+              <a:buSzPct val="100000"/>
+              <a:buChar char="•"/>
+            </a:pPr>
+            <a:r>
+              <a:rPr lang="en-US" sz="1200" dirty="0">
+                <a:solidFill>
+                  <a:srgbClr val="1C2833"/>
+                </a:solidFill>
+                <a:latin typeface="Arial" pitchFamily="34" charset="0"/>
+                <a:ea typeface="Arial" pitchFamily="34" charset="-122"/>
+                <a:cs typeface="Arial" pitchFamily="34" charset="-120"/>
+              </a:rPr>
+              <a:t>4 minutes — pack up, photograph today's progress.</a:t>
+            </a:r>
+            <a:endParaRPr lang="en-US" sz="1200" dirty="0"/>
+          </a:p>
+          <a:p>
+            <a:pPr algn="l" marL="342900" indent="-342900">
+              <a:lnSpc>
+                <a:spcPts val="1620"/>
+              </a:lnSpc>
+              <a:spcAft>
+                <a:spcPts val="300"/>
+              </a:spcAft>
+              <a:buSzPct val="100000"/>
+              <a:buChar char="•"/>
+            </a:pPr>
+            <a:r>
+              <a:rPr lang="en-US" sz="1200" dirty="0">
+                <a:solidFill>
+                  <a:srgbClr val="1C2833"/>
+                </a:solidFill>
+                <a:latin typeface="Arial" pitchFamily="34" charset="0"/>
+                <a:ea typeface="Arial" pitchFamily="34" charset="-122"/>
+                <a:cs typeface="Arial" pitchFamily="34" charset="-120"/>
+              </a:rPr>
+              <a:t>3 minutes — daily journal:</a:t>
+            </a:r>
+            <a:endParaRPr lang="en-US" sz="1200" dirty="0"/>
+          </a:p>
+        </p:txBody>
+      </p:sp>
+      <p:sp>
+        <p:nvSpPr>
+          <p:cNvPr id="5" name="Text 3"/>
+          <p:cNvSpPr/>
+          <p:nvPr/>
+        </p:nvSpPr>
+        <p:spPr>
+          <a:xfrm>
+            <a:off x="406301" y="1510754"/>
+            <a:ext cx="8331398" cy="842963"/>
+          </a:xfrm>
+          <a:prstGeom prst="rect">
+            <a:avLst/>
+          </a:prstGeom>
+          <a:solidFill>
+            <a:srgbClr val="F4F8F9"/>
+          </a:solidFill>
+          <a:ln/>
+        </p:spPr>
+        <p:txBody>
+          <a:bodyPr wrap="square" rtlCol="0" anchor="ctr"/>
+          <a:lstStyle/>
+          <a:p>
+            <a:pPr indent="0" marL="0">
+              <a:buNone/>
+            </a:pPr>
+            <a:endParaRPr lang="en-US" dirty="0"/>
+          </a:p>
+        </p:txBody>
+      </p:sp>
+      <p:sp>
+        <p:nvSpPr>
+          <p:cNvPr id="6" name="Shape 4"/>
+          <p:cNvSpPr/>
+          <p:nvPr/>
+        </p:nvSpPr>
+        <p:spPr>
+          <a:xfrm>
+            <a:off x="434876" y="1510754"/>
+            <a:ext cx="0" cy="842962"/>
+          </a:xfrm>
+          <a:prstGeom prst="line">
+            <a:avLst/>
+          </a:prstGeom>
+          <a:noFill/>
+          <a:ln w="57150">
+            <a:solidFill>
+              <a:srgbClr val="FE4447"/>
+            </a:solidFill>
+            <a:prstDash val="solid"/>
+          </a:ln>
+        </p:spPr>
+      </p:sp>
+      <p:sp>
+        <p:nvSpPr>
+          <p:cNvPr id="7" name="Text 5"/>
+          <p:cNvSpPr/>
+          <p:nvPr/>
+        </p:nvSpPr>
+        <p:spPr>
+          <a:xfrm>
+            <a:off x="692051" y="1701254"/>
+            <a:ext cx="7973389" cy="461963"/>
+          </a:xfrm>
+          <a:prstGeom prst="rect">
+            <a:avLst/>
+          </a:prstGeom>
+          <a:noFill/>
+          <a:ln/>
+        </p:spPr>
+        <p:txBody>
+          <a:bodyPr wrap="square" lIns="0" tIns="0" rIns="0" bIns="0" rtlCol="0" anchor="t"/>
+          <a:lstStyle/>
+          <a:p>
+            <a:pPr algn="l" indent="0" marL="0">
+              <a:lnSpc>
+                <a:spcPts val="1820"/>
               </a:lnSpc>
               <a:spcBef>
                 <a:spcPts val="300"/>
@@ -2604,6 +2941,52 @@
               <a:buNone/>
             </a:pPr>
             <a:r>
+              <a:rPr lang="en-US" sz="1300" i="1" dirty="0">
+                <a:solidFill>
+                  <a:srgbClr val="1C2833"/>
+                </a:solidFill>
+                <a:latin typeface="Georgia" pitchFamily="34" charset="0"/>
+                <a:ea typeface="Georgia" pitchFamily="34" charset="-122"/>
+                <a:cs typeface="Georgia" pitchFamily="34" charset="-120"/>
+              </a:rPr>
+              <a:t>"My artefact is now ___% complete. What I still need to do for documentation (Day 8): ___ . What I cut today, if anything: ___ ."</a:t>
+            </a:r>
+            <a:endParaRPr lang="en-US" sz="1300" dirty="0"/>
+          </a:p>
+        </p:txBody>
+      </p:sp>
+      <p:sp>
+        <p:nvSpPr>
+          <p:cNvPr id="8" name="Text 6"/>
+          <p:cNvSpPr/>
+          <p:nvPr/>
+        </p:nvSpPr>
+        <p:spPr>
+          <a:xfrm>
+            <a:off x="634901" y="2455218"/>
+            <a:ext cx="8102798" cy="281880"/>
+          </a:xfrm>
+          <a:prstGeom prst="rect">
+            <a:avLst/>
+          </a:prstGeom>
+          <a:noFill/>
+          <a:ln/>
+        </p:spPr>
+        <p:txBody>
+          <a:bodyPr wrap="square" lIns="0" tIns="0" rIns="0" bIns="0" rtlCol="0" anchor="t"/>
+          <a:lstStyle/>
+          <a:p>
+            <a:pPr algn="l" marL="342900" indent="-342900">
+              <a:lnSpc>
+                <a:spcPts val="1620"/>
+              </a:lnSpc>
+              <a:spcAft>
+                <a:spcPts val="300"/>
+              </a:spcAft>
+              <a:buSzPct val="100000"/>
+              <a:buChar char="•"/>
+            </a:pPr>
+            <a:r>
               <a:rPr lang="en-US" sz="1200" dirty="0">
                 <a:solidFill>
                   <a:srgbClr val="1C2833"/>
@@ -2612,53 +2995,7 @@
                 <a:ea typeface="Arial" pitchFamily="34" charset="-122"/>
                 <a:cs typeface="Arial" pitchFamily="34" charset="-120"/>
               </a:rPr>
-              <a:t>– Cap home-work at </a:t>
-            </a:r>
-            <a:pPr algn="l" indent="0" marL="0">
-              <a:lnSpc>
-                <a:spcPts val="1680"/>
-              </a:lnSpc>
-              <a:spcBef>
-                <a:spcPts val="300"/>
-              </a:spcBef>
-              <a:spcAft>
-                <a:spcPts val="300"/>
-              </a:spcAft>
-              <a:buNone/>
-            </a:pPr>
-            <a:r>
-              <a:rPr lang="en-US" sz="1200" b="1" dirty="0">
-                <a:solidFill>
-                  <a:srgbClr val="1C2833"/>
-                </a:solidFill>
-                <a:latin typeface="Arial" pitchFamily="34" charset="0"/>
-                <a:ea typeface="Arial" pitchFamily="34" charset="-122"/>
-                <a:cs typeface="Arial" pitchFamily="34" charset="-120"/>
-              </a:rPr>
-              <a:t>20 minutes</a:t>
-            </a:r>
-            <a:pPr algn="l" indent="0" marL="0">
-              <a:lnSpc>
-                <a:spcPts val="1680"/>
-              </a:lnSpc>
-              <a:spcBef>
-                <a:spcPts val="300"/>
-              </a:spcBef>
-              <a:spcAft>
-                <a:spcPts val="300"/>
-              </a:spcAft>
-              <a:buNone/>
-            </a:pPr>
-            <a:r>
-              <a:rPr lang="en-US" sz="1200" dirty="0">
-                <a:solidFill>
-                  <a:srgbClr val="1C2833"/>
-                </a:solidFill>
-                <a:latin typeface="Arial" pitchFamily="34" charset="0"/>
-                <a:ea typeface="Arial" pitchFamily="34" charset="-122"/>
-                <a:cs typeface="Arial" pitchFamily="34" charset="-120"/>
-              </a:rPr>
-              <a:t>. Done-is-better-than-perfect. – If you have a partner, agree tonight (text or call) on who does what last bit. Don't duplicate. – Read tonight's journal entry aloud to a parent or sibling. This is good rehearsal of what you'll write up tomorrow.</a:t>
+              <a:t>Submit journals.</a:t>
             </a:r>
             <a:endParaRPr lang="en-US" sz="1200" dirty="0"/>
           </a:p>
@@ -2666,7 +3003,7 @@
       </p:sp>
       <p:sp>
         <p:nvSpPr>
-          <p:cNvPr id="5" name="Text 3"/>
+          <p:cNvPr id="9" name="Text 7"/>
           <p:cNvSpPr/>
           <p:nvPr/>
         </p:nvSpPr>
@@ -2816,7 +3153,7 @@
                 <a:ea typeface="Georgia" pitchFamily="34" charset="-122"/>
                 <a:cs typeface="Georgia" pitchFamily="34" charset="-120"/>
               </a:rPr>
-              <a:t>Differentiation</a:t>
+              <a:t>Student-facing content</a:t>
             </a:r>
             <a:endParaRPr lang="en-US" sz="1800" dirty="0"/>
           </a:p>
@@ -2830,111 +3167,340 @@
         </p:nvSpPr>
         <p:spPr>
           <a:xfrm>
-            <a:off x="634901" y="883593"/>
-            <a:ext cx="8102798" cy="937022"/>
-          </a:xfrm>
-          <a:prstGeom prst="rect">
+            <a:off x="406301" y="883593"/>
+            <a:ext cx="8331398" cy="2381250"/>
+          </a:xfrm>
+          <a:prstGeom prst="rect">
+            <a:avLst/>
+          </a:prstGeom>
+          <a:solidFill>
+            <a:srgbClr val="F4F8F9"/>
+          </a:solidFill>
+          <a:ln/>
+        </p:spPr>
+        <p:txBody>
+          <a:bodyPr wrap="square" rtlCol="0" anchor="ctr"/>
+          <a:lstStyle/>
+          <a:p>
+            <a:pPr indent="0" marL="0">
+              <a:buNone/>
+            </a:pPr>
+            <a:endParaRPr lang="en-US" dirty="0"/>
+          </a:p>
+        </p:txBody>
+      </p:sp>
+      <p:sp>
+        <p:nvSpPr>
+          <p:cNvPr id="5" name="Shape 3"/>
+          <p:cNvSpPr/>
+          <p:nvPr/>
+        </p:nvSpPr>
+        <p:spPr>
+          <a:xfrm>
+            <a:off x="434876" y="883593"/>
+            <a:ext cx="0" cy="2381250"/>
+          </a:xfrm>
+          <a:prstGeom prst="line">
             <a:avLst/>
           </a:prstGeom>
           <a:noFill/>
+          <a:ln w="57150">
+            <a:solidFill>
+              <a:srgbClr val="FE4447"/>
+            </a:solidFill>
+            <a:prstDash val="solid"/>
+          </a:ln>
+        </p:spPr>
+      </p:sp>
+      <p:sp>
+        <p:nvSpPr>
+          <p:cNvPr id="6" name="Text 4"/>
+          <p:cNvSpPr/>
+          <p:nvPr/>
+        </p:nvSpPr>
+        <p:spPr>
+          <a:xfrm>
+            <a:off x="692051" y="1074093"/>
+            <a:ext cx="7973389" cy="230981"/>
+          </a:xfrm>
+          <a:prstGeom prst="rect">
+            <a:avLst/>
+          </a:prstGeom>
+          <a:noFill/>
           <a:ln/>
         </p:spPr>
         <p:txBody>
           <a:bodyPr wrap="square" lIns="0" tIns="0" rIns="0" bIns="0" rtlCol="0" anchor="t"/>
           <a:lstStyle/>
           <a:p>
-            <a:pPr algn="l" marL="342900" indent="-342900">
-              <a:lnSpc>
-                <a:spcPts val="1620"/>
-              </a:lnSpc>
-              <a:spcAft>
-                <a:spcPts val="300"/>
-              </a:spcAft>
-              <a:buSzPct val="100000"/>
-              <a:buChar char="•"/>
-            </a:pPr>
-            <a:r>
-              <a:rPr lang="en-US" sz="1200" b="1" dirty="0">
-                <a:solidFill>
-                  <a:srgbClr val="1C2833"/>
-                </a:solidFill>
-                <a:latin typeface="Arial" pitchFamily="34" charset="0"/>
-                <a:ea typeface="Arial" pitchFamily="34" charset="-122"/>
-                <a:cs typeface="Arial" pitchFamily="34" charset="-120"/>
-              </a:rPr>
-              <a:t>One tier up:</a:t>
-            </a:r>
-            <a:pPr algn="l" indent="0" marL="0">
-              <a:lnSpc>
-                <a:spcPts val="1620"/>
-              </a:lnSpc>
-              <a:spcAft>
-                <a:spcPts val="300"/>
-              </a:spcAft>
-              <a:buNone/>
-            </a:pPr>
-            <a:r>
-              <a:rPr lang="en-US" sz="1200" dirty="0">
-                <a:solidFill>
-                  <a:srgbClr val="1C2833"/>
-                </a:solidFill>
-                <a:latin typeface="Arial" pitchFamily="34" charset="0"/>
-                <a:ea typeface="Arial" pitchFamily="34" charset="-122"/>
-                <a:cs typeface="Arial" pitchFamily="34" charset="-120"/>
-              </a:rPr>
-              <a:t> If you're at 100% by the 25-minute mark, start your Day 8 documentation today — open a fresh page and outline the process write-up.</a:t>
-            </a:r>
-            <a:endParaRPr lang="en-US" sz="1200" dirty="0"/>
-          </a:p>
-          <a:p>
-            <a:pPr algn="l" marL="342900" indent="-342900">
-              <a:lnSpc>
-                <a:spcPts val="1620"/>
-              </a:lnSpc>
-              <a:spcAft>
-                <a:spcPts val="300"/>
-              </a:spcAft>
-              <a:buSzPct val="100000"/>
-              <a:buChar char="•"/>
-            </a:pPr>
-            <a:r>
-              <a:rPr lang="en-US" sz="1200" b="1" dirty="0">
-                <a:solidFill>
-                  <a:srgbClr val="1C2833"/>
-                </a:solidFill>
-                <a:latin typeface="Arial" pitchFamily="34" charset="0"/>
-                <a:ea typeface="Arial" pitchFamily="34" charset="-122"/>
-                <a:cs typeface="Arial" pitchFamily="34" charset="-120"/>
-              </a:rPr>
-              <a:t>One tier down:</a:t>
-            </a:r>
-            <a:pPr algn="l" indent="0" marL="0">
-              <a:lnSpc>
-                <a:spcPts val="1620"/>
-              </a:lnSpc>
-              <a:spcAft>
-                <a:spcPts val="300"/>
-              </a:spcAft>
-              <a:buNone/>
-            </a:pPr>
-            <a:r>
-              <a:rPr lang="en-US" sz="1200" dirty="0">
-                <a:solidFill>
-                  <a:srgbClr val="1C2833"/>
-                </a:solidFill>
-                <a:latin typeface="Arial" pitchFamily="34" charset="0"/>
-                <a:ea typeface="Arial" pitchFamily="34" charset="-122"/>
-                <a:cs typeface="Arial" pitchFamily="34" charset="-120"/>
-              </a:rPr>
-              <a:t> If you cut twice and still aren't at 80%, accept the cut artefact as your final. The reflection on what you cut is now part of your documentation — that reflection is worth marks.</a:t>
-            </a:r>
-            <a:endParaRPr lang="en-US" sz="1200" dirty="0"/>
-          </a:p>
-        </p:txBody>
-      </p:sp>
-      <p:sp>
-        <p:nvSpPr>
-          <p:cNvPr id="5" name="Text 3"/>
+            <a:pPr algn="l" indent="0" marL="0">
+              <a:lnSpc>
+                <a:spcPts val="1820"/>
+              </a:lnSpc>
+              <a:spcBef>
+                <a:spcPts val="300"/>
+              </a:spcBef>
+              <a:spcAft>
+                <a:spcPts val="300"/>
+              </a:spcAft>
+              <a:buNone/>
+            </a:pPr>
+            <a:r>
+              <a:rPr lang="en-US" sz="1300" b="1" i="1" dirty="0">
+                <a:solidFill>
+                  <a:srgbClr val="1C2833"/>
+                </a:solidFill>
+                <a:latin typeface="Georgia" pitchFamily="34" charset="0"/>
+                <a:ea typeface="Georgia" pitchFamily="34" charset="-122"/>
+                <a:cs typeface="Georgia" pitchFamily="34" charset="-120"/>
+              </a:rPr>
+              <a:t>Day 7. You finish 80% today.</a:t>
+            </a:r>
+            <a:endParaRPr lang="en-US" sz="1300" dirty="0"/>
+          </a:p>
+        </p:txBody>
+      </p:sp>
+      <p:sp>
+        <p:nvSpPr>
+          <p:cNvPr id="7" name="Text 5"/>
+          <p:cNvSpPr/>
+          <p:nvPr/>
+        </p:nvSpPr>
+        <p:spPr>
+          <a:xfrm>
+            <a:off x="692051" y="1343174"/>
+            <a:ext cx="7973389" cy="230981"/>
+          </a:xfrm>
+          <a:prstGeom prst="rect">
+            <a:avLst/>
+          </a:prstGeom>
+          <a:noFill/>
+          <a:ln/>
+        </p:spPr>
+        <p:txBody>
+          <a:bodyPr wrap="square" lIns="0" tIns="0" rIns="0" bIns="0" rtlCol="0" anchor="t"/>
+          <a:lstStyle/>
+          <a:p>
+            <a:pPr algn="l" indent="0" marL="0">
+              <a:lnSpc>
+                <a:spcPts val="1820"/>
+              </a:lnSpc>
+              <a:spcBef>
+                <a:spcPts val="300"/>
+              </a:spcBef>
+              <a:spcAft>
+                <a:spcPts val="300"/>
+              </a:spcAft>
+              <a:buNone/>
+            </a:pPr>
+            <a:r>
+              <a:rPr lang="en-US" sz="1300" i="1" dirty="0">
+                <a:solidFill>
+                  <a:srgbClr val="1C2833"/>
+                </a:solidFill>
+                <a:latin typeface="Georgia" pitchFamily="34" charset="0"/>
+                <a:ea typeface="Georgia" pitchFamily="34" charset="-122"/>
+                <a:cs typeface="Georgia" pitchFamily="34" charset="-120"/>
+              </a:rPr>
+              <a:t>Same protocol as yesterday — quiet, focused, no new teaching.</a:t>
+            </a:r>
+            <a:endParaRPr lang="en-US" sz="1300" dirty="0"/>
+          </a:p>
+        </p:txBody>
+      </p:sp>
+      <p:sp>
+        <p:nvSpPr>
+          <p:cNvPr id="8" name="Text 6"/>
+          <p:cNvSpPr/>
+          <p:nvPr/>
+        </p:nvSpPr>
+        <p:spPr>
+          <a:xfrm>
+            <a:off x="692051" y="1612255"/>
+            <a:ext cx="7973389" cy="692944"/>
+          </a:xfrm>
+          <a:prstGeom prst="rect">
+            <a:avLst/>
+          </a:prstGeom>
+          <a:noFill/>
+          <a:ln/>
+        </p:spPr>
+        <p:txBody>
+          <a:bodyPr wrap="square" lIns="0" tIns="0" rIns="0" bIns="0" rtlCol="0" anchor="t"/>
+          <a:lstStyle/>
+          <a:p>
+            <a:pPr algn="l" indent="0" marL="0">
+              <a:lnSpc>
+                <a:spcPts val="1820"/>
+              </a:lnSpc>
+              <a:spcBef>
+                <a:spcPts val="300"/>
+              </a:spcBef>
+              <a:spcAft>
+                <a:spcPts val="300"/>
+              </a:spcAft>
+              <a:buNone/>
+            </a:pPr>
+            <a:r>
+              <a:rPr lang="en-US" sz="1300" dirty="0">
+                <a:solidFill>
+                  <a:srgbClr val="1C2833"/>
+                </a:solidFill>
+                <a:latin typeface="Georgia" pitchFamily="34" charset="0"/>
+                <a:ea typeface="Georgia" pitchFamily="34" charset="-122"/>
+                <a:cs typeface="Georgia" pitchFamily="34" charset="-120"/>
+              </a:rPr>
+              <a:t>Mid-session check: hands up if 80% will be done by the bell. If your hand goes down, come see me. We will cut something. </a:t>
+            </a:r>
+            <a:pPr algn="l" indent="0" marL="0">
+              <a:lnSpc>
+                <a:spcPts val="1820"/>
+              </a:lnSpc>
+              <a:spcBef>
+                <a:spcPts val="300"/>
+              </a:spcBef>
+              <a:spcAft>
+                <a:spcPts val="300"/>
+              </a:spcAft>
+              <a:buNone/>
+            </a:pPr>
+            <a:r>
+              <a:rPr lang="en-US" sz="1300" b="1" i="1" dirty="0">
+                <a:solidFill>
+                  <a:srgbClr val="1C2833"/>
+                </a:solidFill>
+                <a:latin typeface="Georgia" pitchFamily="34" charset="0"/>
+                <a:ea typeface="Georgia" pitchFamily="34" charset="-122"/>
+                <a:cs typeface="Georgia" pitchFamily="34" charset="-120"/>
+              </a:rPr>
+              <a:t>Cutting is fine.</a:t>
+            </a:r>
+            <a:pPr algn="l" indent="0" marL="0">
+              <a:lnSpc>
+                <a:spcPts val="1820"/>
+              </a:lnSpc>
+              <a:spcBef>
+                <a:spcPts val="300"/>
+              </a:spcBef>
+              <a:spcAft>
+                <a:spcPts val="300"/>
+              </a:spcAft>
+              <a:buNone/>
+            </a:pPr>
+            <a:r>
+              <a:rPr lang="en-US" sz="1300" dirty="0">
+                <a:solidFill>
+                  <a:srgbClr val="1C2833"/>
+                </a:solidFill>
+                <a:latin typeface="Georgia" pitchFamily="34" charset="0"/>
+                <a:ea typeface="Georgia" pitchFamily="34" charset="-122"/>
+                <a:cs typeface="Georgia" pitchFamily="34" charset="-120"/>
+              </a:rPr>
+              <a:t> The rubric rewards a finished small thing over an unfinished big thing.</a:t>
+            </a:r>
+            <a:endParaRPr lang="en-US" sz="1300" dirty="0"/>
+          </a:p>
+        </p:txBody>
+      </p:sp>
+      <p:sp>
+        <p:nvSpPr>
+          <p:cNvPr id="9" name="Text 7"/>
+          <p:cNvSpPr/>
+          <p:nvPr/>
+        </p:nvSpPr>
+        <p:spPr>
+          <a:xfrm>
+            <a:off x="692051" y="2343299"/>
+            <a:ext cx="7973389" cy="461963"/>
+          </a:xfrm>
+          <a:prstGeom prst="rect">
+            <a:avLst/>
+          </a:prstGeom>
+          <a:noFill/>
+          <a:ln/>
+        </p:spPr>
+        <p:txBody>
+          <a:bodyPr wrap="square" lIns="0" tIns="0" rIns="0" bIns="0" rtlCol="0" anchor="t"/>
+          <a:lstStyle/>
+          <a:p>
+            <a:pPr algn="l" indent="0" marL="0">
+              <a:lnSpc>
+                <a:spcPts val="1820"/>
+              </a:lnSpc>
+              <a:spcBef>
+                <a:spcPts val="300"/>
+              </a:spcBef>
+              <a:spcAft>
+                <a:spcPts val="300"/>
+              </a:spcAft>
+              <a:buNone/>
+            </a:pPr>
+            <a:r>
+              <a:rPr lang="en-US" sz="1300" i="1" dirty="0">
+                <a:solidFill>
+                  <a:srgbClr val="1C2833"/>
+                </a:solidFill>
+                <a:latin typeface="Georgia" pitchFamily="34" charset="0"/>
+                <a:ea typeface="Georgia" pitchFamily="34" charset="-122"/>
+                <a:cs typeface="Georgia" pitchFamily="34" charset="-120"/>
+              </a:rPr>
+              <a:t>At the 25-minute mark, everyone holds up one thing they made today for the room to see. Five seconds, silent. Then back to work.</a:t>
+            </a:r>
+            <a:endParaRPr lang="en-US" sz="1300" dirty="0"/>
+          </a:p>
+        </p:txBody>
+      </p:sp>
+      <p:sp>
+        <p:nvSpPr>
+          <p:cNvPr id="10" name="Text 8"/>
+          <p:cNvSpPr/>
+          <p:nvPr/>
+        </p:nvSpPr>
+        <p:spPr>
+          <a:xfrm>
+            <a:off x="692051" y="2843361"/>
+            <a:ext cx="7973389" cy="230981"/>
+          </a:xfrm>
+          <a:prstGeom prst="rect">
+            <a:avLst/>
+          </a:prstGeom>
+          <a:noFill/>
+          <a:ln/>
+        </p:spPr>
+        <p:txBody>
+          <a:bodyPr wrap="square" lIns="0" tIns="0" rIns="0" bIns="0" rtlCol="0" anchor="t"/>
+          <a:lstStyle/>
+          <a:p>
+            <a:pPr algn="l" indent="0" marL="0">
+              <a:lnSpc>
+                <a:spcPts val="1820"/>
+              </a:lnSpc>
+              <a:spcBef>
+                <a:spcPts val="300"/>
+              </a:spcBef>
+              <a:spcAft>
+                <a:spcPts val="300"/>
+              </a:spcAft>
+              <a:buNone/>
+            </a:pPr>
+            <a:r>
+              <a:rPr lang="en-US" sz="1300" i="1" dirty="0">
+                <a:solidFill>
+                  <a:srgbClr val="1C2833"/>
+                </a:solidFill>
+                <a:latin typeface="Georgia" pitchFamily="34" charset="0"/>
+                <a:ea typeface="Georgia" pitchFamily="34" charset="-122"/>
+                <a:cs typeface="Georgia" pitchFamily="34" charset="-120"/>
+              </a:rPr>
+              <a:t>By end of class — your artefact is 80% complete. Tomorrow you write it up.</a:t>
+            </a:r>
+            <a:endParaRPr lang="en-US" sz="1300" dirty="0"/>
+          </a:p>
+        </p:txBody>
+      </p:sp>
+      <p:sp>
+        <p:nvSpPr>
+          <p:cNvPr id="11" name="Text 9"/>
           <p:cNvSpPr/>
           <p:nvPr/>
         </p:nvSpPr>
@@ -3084,7 +3650,7 @@
                 <a:ea typeface="Georgia" pitchFamily="34" charset="-122"/>
                 <a:cs typeface="Georgia" pitchFamily="34" charset="-120"/>
               </a:rPr>
-              <a:t>Teacher notes</a:t>
+              <a:t>Homework</a:t>
             </a:r>
             <a:endParaRPr lang="en-US" sz="1800" dirty="0"/>
           </a:p>
@@ -3098,8 +3664,8 @@
         </p:nvSpPr>
         <p:spPr>
           <a:xfrm>
-            <a:off x="406301" y="870942"/>
-            <a:ext cx="8498026" cy="1919436"/>
+            <a:off x="634901" y="883593"/>
+            <a:ext cx="8102798" cy="769441"/>
           </a:xfrm>
           <a:prstGeom prst="rect">
             <a:avLst/>
@@ -3111,17 +3677,15 @@
           <a:bodyPr wrap="square" lIns="0" tIns="0" rIns="0" bIns="0" rtlCol="0" anchor="t"/>
           <a:lstStyle/>
           <a:p>
-            <a:pPr algn="l" indent="0" marL="0">
-              <a:lnSpc>
-                <a:spcPts val="1680"/>
-              </a:lnSpc>
-              <a:spcBef>
-                <a:spcPts val="300"/>
-              </a:spcBef>
-              <a:spcAft>
-                <a:spcPts val="300"/>
-              </a:spcAft>
-              <a:buNone/>
+            <a:pPr algn="l" marL="342900" indent="-342900">
+              <a:lnSpc>
+                <a:spcPts val="1620"/>
+              </a:lnSpc>
+              <a:spcAft>
+                <a:spcPts val="300"/>
+              </a:spcAft>
+              <a:buSzPct val="100000"/>
+              <a:buChar char="•"/>
             </a:pPr>
             <a:r>
               <a:rPr lang="en-US" sz="1200" dirty="0">
@@ -3132,38 +3696,32 @@
                 <a:ea typeface="Arial" pitchFamily="34" charset="-122"/>
                 <a:cs typeface="Arial" pitchFamily="34" charset="-120"/>
               </a:rPr>
-              <a:t>– The hardest students today are the </a:t>
-            </a:r>
-            <a:pPr algn="l" indent="0" marL="0">
-              <a:lnSpc>
-                <a:spcPts val="1680"/>
-              </a:lnSpc>
-              <a:spcBef>
-                <a:spcPts val="300"/>
-              </a:spcBef>
-              <a:spcAft>
-                <a:spcPts val="300"/>
-              </a:spcAft>
-              <a:buNone/>
-            </a:pPr>
-            <a:r>
-              <a:rPr lang="en-US" sz="1200" i="1" dirty="0">
-                <a:solidFill>
-                  <a:srgbClr val="1C2833"/>
-                </a:solidFill>
-                <a:latin typeface="Arial" pitchFamily="34" charset="0"/>
-                <a:ea typeface="Arial" pitchFamily="34" charset="-122"/>
-                <a:cs typeface="Arial" pitchFamily="34" charset="-120"/>
-              </a:rPr>
-              <a:t>perfectionists</a:t>
-            </a:r>
-            <a:pPr algn="l" indent="0" marL="0">
-              <a:lnSpc>
-                <a:spcPts val="1680"/>
-              </a:lnSpc>
-              <a:spcBef>
-                <a:spcPts val="300"/>
-              </a:spcBef>
+              <a:t>Cap home-work at </a:t>
+            </a:r>
+            <a:pPr algn="l" indent="0" marL="0">
+              <a:lnSpc>
+                <a:spcPts val="1620"/>
+              </a:lnSpc>
+              <a:spcAft>
+                <a:spcPts val="300"/>
+              </a:spcAft>
+              <a:buNone/>
+            </a:pPr>
+            <a:r>
+              <a:rPr lang="en-US" sz="1200" b="1" dirty="0">
+                <a:solidFill>
+                  <a:srgbClr val="1C2833"/>
+                </a:solidFill>
+                <a:latin typeface="Arial" pitchFamily="34" charset="0"/>
+                <a:ea typeface="Arial" pitchFamily="34" charset="-122"/>
+                <a:cs typeface="Arial" pitchFamily="34" charset="-120"/>
+              </a:rPr>
+              <a:t>20 minutes</a:t>
+            </a:r>
+            <a:pPr algn="l" indent="0" marL="0">
+              <a:lnSpc>
+                <a:spcPts val="1620"/>
+              </a:lnSpc>
               <a:spcAft>
                 <a:spcPts val="300"/>
               </a:spcAft>
@@ -3178,42 +3736,20 @@
                 <a:ea typeface="Arial" pitchFamily="34" charset="-122"/>
                 <a:cs typeface="Arial" pitchFamily="34" charset="-120"/>
               </a:rPr>
-              <a:t>. They will refuse to call themselves done at 80% because the last 20% isn't perfect. Tell them: </a:t>
-            </a:r>
-            <a:pPr algn="l" indent="0" marL="0">
-              <a:lnSpc>
-                <a:spcPts val="1680"/>
-              </a:lnSpc>
-              <a:spcBef>
-                <a:spcPts val="300"/>
-              </a:spcBef>
-              <a:spcAft>
-                <a:spcPts val="300"/>
-              </a:spcAft>
-              <a:buNone/>
-            </a:pPr>
-            <a:r>
-              <a:rPr lang="en-US" sz="1200" i="1" dirty="0">
-                <a:solidFill>
-                  <a:srgbClr val="1C2833"/>
-                </a:solidFill>
-                <a:latin typeface="Arial" pitchFamily="34" charset="0"/>
-                <a:ea typeface="Arial" pitchFamily="34" charset="-122"/>
-                <a:cs typeface="Arial" pitchFamily="34" charset="-120"/>
-              </a:rPr>
-              <a:t>the last 20% is what tomorrow is for</a:t>
-            </a:r>
-            <a:pPr algn="l" indent="0" marL="0">
-              <a:lnSpc>
-                <a:spcPts val="1680"/>
-              </a:lnSpc>
-              <a:spcBef>
-                <a:spcPts val="300"/>
-              </a:spcBef>
-              <a:spcAft>
-                <a:spcPts val="300"/>
-              </a:spcAft>
-              <a:buNone/>
+              <a:t>. Done-is-better-than-perfect.</a:t>
+            </a:r>
+            <a:endParaRPr lang="en-US" sz="1200" dirty="0"/>
+          </a:p>
+          <a:p>
+            <a:pPr algn="l" marL="342900" indent="-342900">
+              <a:lnSpc>
+                <a:spcPts val="1620"/>
+              </a:lnSpc>
+              <a:spcAft>
+                <a:spcPts val="300"/>
+              </a:spcAft>
+              <a:buSzPct val="100000"/>
+              <a:buChar char="•"/>
             </a:pPr>
             <a:r>
               <a:rPr lang="en-US" sz="1200" dirty="0">
@@ -3224,42 +3760,20 @@
                 <a:ea typeface="Arial" pitchFamily="34" charset="-122"/>
                 <a:cs typeface="Arial" pitchFamily="34" charset="-120"/>
               </a:rPr>
-              <a:t>. Honour the patience this requires. – Equally hard: the </a:t>
-            </a:r>
-            <a:pPr algn="l" indent="0" marL="0">
-              <a:lnSpc>
-                <a:spcPts val="1680"/>
-              </a:lnSpc>
-              <a:spcBef>
-                <a:spcPts val="300"/>
-              </a:spcBef>
-              <a:spcAft>
-                <a:spcPts val="300"/>
-              </a:spcAft>
-              <a:buNone/>
-            </a:pPr>
-            <a:r>
-              <a:rPr lang="en-US" sz="1200" i="1" dirty="0">
-                <a:solidFill>
-                  <a:srgbClr val="1C2833"/>
-                </a:solidFill>
-                <a:latin typeface="Arial" pitchFamily="34" charset="0"/>
-                <a:ea typeface="Arial" pitchFamily="34" charset="-122"/>
-                <a:cs typeface="Arial" pitchFamily="34" charset="-120"/>
-              </a:rPr>
-              <a:t>coasters</a:t>
-            </a:r>
-            <a:pPr algn="l" indent="0" marL="0">
-              <a:lnSpc>
-                <a:spcPts val="1680"/>
-              </a:lnSpc>
-              <a:spcBef>
-                <a:spcPts val="300"/>
-              </a:spcBef>
-              <a:spcAft>
-                <a:spcPts val="300"/>
-              </a:spcAft>
-              <a:buNone/>
+              <a:t>If you have a partner, agree tonight (text or call) on who does what last bit. Don't duplicate.</a:t>
+            </a:r>
+            <a:endParaRPr lang="en-US" sz="1200" dirty="0"/>
+          </a:p>
+          <a:p>
+            <a:pPr algn="l" marL="342900" indent="-342900">
+              <a:lnSpc>
+                <a:spcPts val="1620"/>
+              </a:lnSpc>
+              <a:spcAft>
+                <a:spcPts val="300"/>
+              </a:spcAft>
+              <a:buSzPct val="100000"/>
+              <a:buChar char="•"/>
             </a:pPr>
             <a:r>
               <a:rPr lang="en-US" sz="1200" dirty="0">
@@ -3270,99 +3784,7 @@
                 <a:ea typeface="Arial" pitchFamily="34" charset="-122"/>
                 <a:cs typeface="Arial" pitchFamily="34" charset="-120"/>
               </a:rPr>
-              <a:t>. They will declare themselves done at 50% and pull out a phone. Walk over. </a:t>
-            </a:r>
-            <a:pPr algn="l" indent="0" marL="0">
-              <a:lnSpc>
-                <a:spcPts val="1680"/>
-              </a:lnSpc>
-              <a:spcBef>
-                <a:spcPts val="300"/>
-              </a:spcBef>
-              <a:spcAft>
-                <a:spcPts val="300"/>
-              </a:spcAft>
-              <a:buNone/>
-            </a:pPr>
-            <a:r>
-              <a:rPr lang="en-US" sz="1200" i="1" dirty="0">
-                <a:solidFill>
-                  <a:srgbClr val="1C2833"/>
-                </a:solidFill>
-                <a:latin typeface="Arial" pitchFamily="34" charset="0"/>
-                <a:ea typeface="Arial" pitchFamily="34" charset="-122"/>
-                <a:cs typeface="Arial" pitchFamily="34" charset="-120"/>
-              </a:rPr>
-              <a:t>"What was your success criterion #2?"</a:t>
-            </a:r>
-            <a:pPr algn="l" indent="0" marL="0">
-              <a:lnSpc>
-                <a:spcPts val="1680"/>
-              </a:lnSpc>
-              <a:spcBef>
-                <a:spcPts val="300"/>
-              </a:spcBef>
-              <a:spcAft>
-                <a:spcPts val="300"/>
-              </a:spcAft>
-              <a:buNone/>
-            </a:pPr>
-            <a:r>
-              <a:rPr lang="en-US" sz="1200" dirty="0">
-                <a:solidFill>
-                  <a:srgbClr val="1C2833"/>
-                </a:solidFill>
-                <a:latin typeface="Arial" pitchFamily="34" charset="0"/>
-                <a:ea typeface="Arial" pitchFamily="34" charset="-122"/>
-                <a:cs typeface="Arial" pitchFamily="34" charset="-120"/>
-              </a:rPr>
-              <a:t> Make them say it. Then ask, </a:t>
-            </a:r>
-            <a:pPr algn="l" indent="0" marL="0">
-              <a:lnSpc>
-                <a:spcPts val="1680"/>
-              </a:lnSpc>
-              <a:spcBef>
-                <a:spcPts val="300"/>
-              </a:spcBef>
-              <a:spcAft>
-                <a:spcPts val="300"/>
-              </a:spcAft>
-              <a:buNone/>
-            </a:pPr>
-            <a:r>
-              <a:rPr lang="en-US" sz="1200" i="1" dirty="0">
-                <a:solidFill>
-                  <a:srgbClr val="1C2833"/>
-                </a:solidFill>
-                <a:latin typeface="Arial" pitchFamily="34" charset="0"/>
-                <a:ea typeface="Arial" pitchFamily="34" charset="-122"/>
-                <a:cs typeface="Arial" pitchFamily="34" charset="-120"/>
-              </a:rPr>
-              <a:t>"Is that visible in what you have?"</a:t>
-            </a:r>
-            <a:pPr algn="l" indent="0" marL="0">
-              <a:lnSpc>
-                <a:spcPts val="1680"/>
-              </a:lnSpc>
-              <a:spcBef>
-                <a:spcPts val="300"/>
-              </a:spcBef>
-              <a:spcAft>
-                <a:spcPts val="300"/>
-              </a:spcAft>
-              <a:buNone/>
-            </a:pPr>
-            <a:r>
-              <a:rPr lang="en-US" sz="1200" dirty="0">
-                <a:solidFill>
-                  <a:srgbClr val="1C2833"/>
-                </a:solidFill>
-                <a:latin typeface="Arial" pitchFamily="34" charset="0"/>
-                <a:ea typeface="Arial" pitchFamily="34" charset="-122"/>
-                <a:cs typeface="Arial" pitchFamily="34" charset="-120"/>
-              </a:rPr>
-              <a:t> Usually it isn't. Direct them to the next thing. – Project 7 (sustainability audit) students should have all data collected by end of today. If not, the audit becomes a "what I'd measure if I had more time" piece — acceptable but flagged in the rubric. – Project 8 (doṣa self-study) students who started their 7-day journal on Day 1 should have 7 entries by today. Students who started later have fewer — that's the cut, and they reflect on it. – Project 9 (multiplication comparison) students should have all timed problems done; today is for tabulating means and writing the one-paragraph conclusion.</a:t>
+              <a:t>Read tonight's journal entry aloud to a parent or sibling. This is good rehearsal of what you'll write up tomorrow.</a:t>
             </a:r>
             <a:endParaRPr lang="en-US" sz="1200" dirty="0"/>
           </a:p>
@@ -3520,7 +3942,7 @@
                 <a:ea typeface="Georgia" pitchFamily="34" charset="-122"/>
                 <a:cs typeface="Georgia" pitchFamily="34" charset="-120"/>
               </a:rPr>
-              <a:t>Common stuck-points (continued from Day 6)</a:t>
+              <a:t>Differentiation</a:t>
             </a:r>
             <a:endParaRPr lang="en-US" sz="1800" dirty="0"/>
           </a:p>
@@ -3534,56 +3956,8 @@
         </p:nvSpPr>
         <p:spPr>
           <a:xfrm>
-            <a:off x="406301" y="870942"/>
-            <a:ext cx="8498026" cy="213271"/>
-          </a:xfrm>
-          <a:prstGeom prst="rect">
-            <a:avLst/>
-          </a:prstGeom>
-          <a:noFill/>
-          <a:ln/>
-        </p:spPr>
-        <p:txBody>
-          <a:bodyPr wrap="square" lIns="0" tIns="0" rIns="0" bIns="0" rtlCol="0" anchor="t"/>
-          <a:lstStyle/>
-          <a:p>
-            <a:pPr algn="l" indent="0" marL="0">
-              <a:lnSpc>
-                <a:spcPts val="1680"/>
-              </a:lnSpc>
-              <a:spcBef>
-                <a:spcPts val="300"/>
-              </a:spcBef>
-              <a:spcAft>
-                <a:spcPts val="300"/>
-              </a:spcAft>
-              <a:buNone/>
-            </a:pPr>
-            <a:r>
-              <a:rPr lang="en-US" sz="1200" i="1" dirty="0">
-                <a:solidFill>
-                  <a:srgbClr val="1C2833"/>
-                </a:solidFill>
-                <a:latin typeface="Arial" pitchFamily="34" charset="0"/>
-                <a:ea typeface="Arial" pitchFamily="34" charset="-122"/>
-                <a:cs typeface="Arial" pitchFamily="34" charset="-120"/>
-              </a:rPr>
-              <a:t>Each row: Stuck on · Quick unblock.</a:t>
-            </a:r>
-            <a:endParaRPr lang="en-US" sz="1200" dirty="0"/>
-          </a:p>
-        </p:txBody>
-      </p:sp>
-      <p:sp>
-        <p:nvSpPr>
-          <p:cNvPr id="5" name="Text 3"/>
-          <p:cNvSpPr/>
-          <p:nvPr/>
-        </p:nvSpPr>
-        <p:spPr>
-          <a:xfrm>
-            <a:off x="634901" y="1173063"/>
-            <a:ext cx="8102798" cy="1013222"/>
+            <a:off x="634901" y="883593"/>
+            <a:ext cx="8102798" cy="937022"/>
           </a:xfrm>
           <a:prstGeom prst="rect">
             <a:avLst/>
@@ -3614,7 +3988,7 @@
                 <a:ea typeface="Arial" pitchFamily="34" charset="-122"/>
                 <a:cs typeface="Arial" pitchFamily="34" charset="-120"/>
               </a:rPr>
-              <a:t>"It looks ugly"</a:t>
+              <a:t>One tier up:</a:t>
             </a:r>
             <a:pPr algn="l" indent="0" marL="0">
               <a:lnSpc>
@@ -3634,7 +4008,7 @@
                 <a:ea typeface="Arial" pitchFamily="34" charset="-122"/>
                 <a:cs typeface="Arial" pitchFamily="34" charset="-120"/>
               </a:rPr>
-              <a:t> — Aesthetics are 1 line of the rubric, not 6. Move on.</a:t>
+              <a:t> If you're at 100% by the 25-minute mark, start your Day 8 documentation today — open a fresh page and outline the process write-up.</a:t>
             </a:r>
             <a:endParaRPr lang="en-US" sz="1200" dirty="0"/>
           </a:p>
@@ -3658,7 +4032,7 @@
                 <a:ea typeface="Arial" pitchFamily="34" charset="-122"/>
                 <a:cs typeface="Arial" pitchFamily="34" charset="-120"/>
               </a:rPr>
-              <a:t>"I have too many citations on one page"</a:t>
+              <a:t>One tier down:</a:t>
             </a:r>
             <a:pPr algn="l" indent="0" marL="0">
               <a:lnSpc>
@@ -3678,103 +4052,15 @@
                 <a:ea typeface="Arial" pitchFamily="34" charset="-122"/>
                 <a:cs typeface="Arial" pitchFamily="34" charset="-120"/>
               </a:rPr>
-              <a:t> — Footnote them; only the strongest one needs to be in the body.</a:t>
+              <a:t> If you cut twice and still aren't at 80%, accept the cut artefact as your final. The reflection on what you cut is now part of your documentation — that reflection is worth marks.</a:t>
             </a:r>
             <a:endParaRPr lang="en-US" sz="1200" dirty="0"/>
           </a:p>
-          <a:p>
-            <a:pPr algn="l" marL="342900" indent="-342900">
-              <a:lnSpc>
-                <a:spcPts val="1620"/>
-              </a:lnSpc>
-              <a:spcAft>
-                <a:spcPts val="300"/>
-              </a:spcAft>
-              <a:buSzPct val="100000"/>
-              <a:buChar char="•"/>
-            </a:pPr>
-            <a:r>
-              <a:rPr lang="en-US" sz="1200" b="1" dirty="0">
-                <a:solidFill>
-                  <a:srgbClr val="1C2833"/>
-                </a:solidFill>
-                <a:latin typeface="Arial" pitchFamily="34" charset="0"/>
-                <a:ea typeface="Arial" pitchFamily="34" charset="-122"/>
-                <a:cs typeface="Arial" pitchFamily="34" charset="-120"/>
-              </a:rPr>
-              <a:t>"My partner finished before me"</a:t>
-            </a:r>
-            <a:pPr algn="l" indent="0" marL="0">
-              <a:lnSpc>
-                <a:spcPts val="1620"/>
-              </a:lnSpc>
-              <a:spcAft>
-                <a:spcPts val="300"/>
-              </a:spcAft>
-              <a:buNone/>
-            </a:pPr>
-            <a:r>
-              <a:rPr lang="en-US" sz="1200" dirty="0">
-                <a:solidFill>
-                  <a:srgbClr val="1C2833"/>
-                </a:solidFill>
-                <a:latin typeface="Arial" pitchFamily="34" charset="0"/>
-                <a:ea typeface="Arial" pitchFamily="34" charset="-122"/>
-                <a:cs typeface="Arial" pitchFamily="34" charset="-120"/>
-              </a:rPr>
-              <a:t> — Re-divide. They help on the final 20% in a new role.</a:t>
-            </a:r>
-            <a:endParaRPr lang="en-US" sz="1200" dirty="0"/>
-          </a:p>
-          <a:p>
-            <a:pPr algn="l" marL="342900" indent="-342900">
-              <a:lnSpc>
-                <a:spcPts val="1620"/>
-              </a:lnSpc>
-              <a:spcAft>
-                <a:spcPts val="300"/>
-              </a:spcAft>
-              <a:buSzPct val="100000"/>
-              <a:buChar char="•"/>
-            </a:pPr>
-            <a:r>
-              <a:rPr lang="en-US" sz="1200" b="1" dirty="0">
-                <a:solidFill>
-                  <a:srgbClr val="1C2833"/>
-                </a:solidFill>
-                <a:latin typeface="Arial" pitchFamily="34" charset="0"/>
-                <a:ea typeface="Arial" pitchFamily="34" charset="-122"/>
-                <a:cs typeface="Arial" pitchFamily="34" charset="-120"/>
-              </a:rPr>
-              <a:t>"I want to redo it"</a:t>
-            </a:r>
-            <a:pPr algn="l" indent="0" marL="0">
-              <a:lnSpc>
-                <a:spcPts val="1620"/>
-              </a:lnSpc>
-              <a:spcAft>
-                <a:spcPts val="300"/>
-              </a:spcAft>
-              <a:buNone/>
-            </a:pPr>
-            <a:r>
-              <a:rPr lang="en-US" sz="1200" dirty="0">
-                <a:solidFill>
-                  <a:srgbClr val="1C2833"/>
-                </a:solidFill>
-                <a:latin typeface="Arial" pitchFamily="34" charset="0"/>
-                <a:ea typeface="Arial" pitchFamily="34" charset="-122"/>
-                <a:cs typeface="Arial" pitchFamily="34" charset="-120"/>
-              </a:rPr>
-              <a:t> — No. The rubric rewards iteration on what exists, not restarts.</a:t>
-            </a:r>
-            <a:endParaRPr lang="en-US" sz="1200" dirty="0"/>
-          </a:p>
-        </p:txBody>
-      </p:sp>
-      <p:sp>
-        <p:nvSpPr>
-          <p:cNvPr id="6" name="Text 4"/>
+        </p:txBody>
+      </p:sp>
+      <p:sp>
+        <p:nvSpPr>
+          <p:cNvPr id="5" name="Text 3"/>
           <p:cNvSpPr/>
           <p:nvPr/>
         </p:nvSpPr>
@@ -3924,7 +4210,687 @@
                 <a:ea typeface="Georgia" pitchFamily="34" charset="-122"/>
                 <a:cs typeface="Georgia" pitchFamily="34" charset="-120"/>
               </a:rPr>
-              <a:t>Citation(s) used in this lesson</a:t>
+              <a:t>Teacher notes</a:t>
+            </a:r>
+            <a:endParaRPr lang="en-US" sz="1800" dirty="0"/>
+          </a:p>
+        </p:txBody>
+      </p:sp>
+      <p:sp>
+        <p:nvSpPr>
+          <p:cNvPr id="4" name="Text 2"/>
+          <p:cNvSpPr/>
+          <p:nvPr/>
+        </p:nvSpPr>
+        <p:spPr>
+          <a:xfrm>
+            <a:off x="634901" y="883593"/>
+            <a:ext cx="8102798" cy="1592163"/>
+          </a:xfrm>
+          <a:prstGeom prst="rect">
+            <a:avLst/>
+          </a:prstGeom>
+          <a:noFill/>
+          <a:ln/>
+        </p:spPr>
+        <p:txBody>
+          <a:bodyPr wrap="square" lIns="0" tIns="0" rIns="0" bIns="0" rtlCol="0" anchor="t"/>
+          <a:lstStyle/>
+          <a:p>
+            <a:pPr algn="l" marL="342900" indent="-342900">
+              <a:lnSpc>
+                <a:spcPts val="1620"/>
+              </a:lnSpc>
+              <a:spcAft>
+                <a:spcPts val="300"/>
+              </a:spcAft>
+              <a:buSzPct val="100000"/>
+              <a:buChar char="•"/>
+            </a:pPr>
+            <a:r>
+              <a:rPr lang="en-US" sz="1200" dirty="0">
+                <a:solidFill>
+                  <a:srgbClr val="1C2833"/>
+                </a:solidFill>
+                <a:latin typeface="Arial" pitchFamily="34" charset="0"/>
+                <a:ea typeface="Arial" pitchFamily="34" charset="-122"/>
+                <a:cs typeface="Arial" pitchFamily="34" charset="-120"/>
+              </a:rPr>
+              <a:t>The hardest students today are the </a:t>
+            </a:r>
+            <a:pPr algn="l" indent="0" marL="0">
+              <a:lnSpc>
+                <a:spcPts val="1620"/>
+              </a:lnSpc>
+              <a:spcAft>
+                <a:spcPts val="300"/>
+              </a:spcAft>
+              <a:buNone/>
+            </a:pPr>
+            <a:r>
+              <a:rPr lang="en-US" sz="1200" i="1" dirty="0">
+                <a:solidFill>
+                  <a:srgbClr val="1C2833"/>
+                </a:solidFill>
+                <a:latin typeface="Arial" pitchFamily="34" charset="0"/>
+                <a:ea typeface="Arial" pitchFamily="34" charset="-122"/>
+                <a:cs typeface="Arial" pitchFamily="34" charset="-120"/>
+              </a:rPr>
+              <a:t>perfectionists</a:t>
+            </a:r>
+            <a:pPr algn="l" indent="0" marL="0">
+              <a:lnSpc>
+                <a:spcPts val="1620"/>
+              </a:lnSpc>
+              <a:spcAft>
+                <a:spcPts val="300"/>
+              </a:spcAft>
+              <a:buNone/>
+            </a:pPr>
+            <a:r>
+              <a:rPr lang="en-US" sz="1200" dirty="0">
+                <a:solidFill>
+                  <a:srgbClr val="1C2833"/>
+                </a:solidFill>
+                <a:latin typeface="Arial" pitchFamily="34" charset="0"/>
+                <a:ea typeface="Arial" pitchFamily="34" charset="-122"/>
+                <a:cs typeface="Arial" pitchFamily="34" charset="-120"/>
+              </a:rPr>
+              <a:t>. They will refuse to call themselves done at 80% because the last 20% isn't perfect. Tell them: </a:t>
+            </a:r>
+            <a:pPr algn="l" indent="0" marL="0">
+              <a:lnSpc>
+                <a:spcPts val="1620"/>
+              </a:lnSpc>
+              <a:spcAft>
+                <a:spcPts val="300"/>
+              </a:spcAft>
+              <a:buNone/>
+            </a:pPr>
+            <a:r>
+              <a:rPr lang="en-US" sz="1200" i="1" dirty="0">
+                <a:solidFill>
+                  <a:srgbClr val="1C2833"/>
+                </a:solidFill>
+                <a:latin typeface="Arial" pitchFamily="34" charset="0"/>
+                <a:ea typeface="Arial" pitchFamily="34" charset="-122"/>
+                <a:cs typeface="Arial" pitchFamily="34" charset="-120"/>
+              </a:rPr>
+              <a:t>the last 20% is what tomorrow is for</a:t>
+            </a:r>
+            <a:pPr algn="l" indent="0" marL="0">
+              <a:lnSpc>
+                <a:spcPts val="1620"/>
+              </a:lnSpc>
+              <a:spcAft>
+                <a:spcPts val="300"/>
+              </a:spcAft>
+              <a:buNone/>
+            </a:pPr>
+            <a:r>
+              <a:rPr lang="en-US" sz="1200" dirty="0">
+                <a:solidFill>
+                  <a:srgbClr val="1C2833"/>
+                </a:solidFill>
+                <a:latin typeface="Arial" pitchFamily="34" charset="0"/>
+                <a:ea typeface="Arial" pitchFamily="34" charset="-122"/>
+                <a:cs typeface="Arial" pitchFamily="34" charset="-120"/>
+              </a:rPr>
+              <a:t>. Honour the patience this requires.</a:t>
+            </a:r>
+            <a:endParaRPr lang="en-US" sz="1200" dirty="0"/>
+          </a:p>
+          <a:p>
+            <a:pPr algn="l" marL="342900" indent="-342900">
+              <a:lnSpc>
+                <a:spcPts val="1620"/>
+              </a:lnSpc>
+              <a:spcAft>
+                <a:spcPts val="300"/>
+              </a:spcAft>
+              <a:buSzPct val="100000"/>
+              <a:buChar char="•"/>
+            </a:pPr>
+            <a:r>
+              <a:rPr lang="en-US" sz="1200" dirty="0">
+                <a:solidFill>
+                  <a:srgbClr val="1C2833"/>
+                </a:solidFill>
+                <a:latin typeface="Arial" pitchFamily="34" charset="0"/>
+                <a:ea typeface="Arial" pitchFamily="34" charset="-122"/>
+                <a:cs typeface="Arial" pitchFamily="34" charset="-120"/>
+              </a:rPr>
+              <a:t>Equally hard: the </a:t>
+            </a:r>
+            <a:pPr algn="l" indent="0" marL="0">
+              <a:lnSpc>
+                <a:spcPts val="1620"/>
+              </a:lnSpc>
+              <a:spcAft>
+                <a:spcPts val="300"/>
+              </a:spcAft>
+              <a:buNone/>
+            </a:pPr>
+            <a:r>
+              <a:rPr lang="en-US" sz="1200" i="1" dirty="0">
+                <a:solidFill>
+                  <a:srgbClr val="1C2833"/>
+                </a:solidFill>
+                <a:latin typeface="Arial" pitchFamily="34" charset="0"/>
+                <a:ea typeface="Arial" pitchFamily="34" charset="-122"/>
+                <a:cs typeface="Arial" pitchFamily="34" charset="-120"/>
+              </a:rPr>
+              <a:t>coasters</a:t>
+            </a:r>
+            <a:pPr algn="l" indent="0" marL="0">
+              <a:lnSpc>
+                <a:spcPts val="1620"/>
+              </a:lnSpc>
+              <a:spcAft>
+                <a:spcPts val="300"/>
+              </a:spcAft>
+              <a:buNone/>
+            </a:pPr>
+            <a:r>
+              <a:rPr lang="en-US" sz="1200" dirty="0">
+                <a:solidFill>
+                  <a:srgbClr val="1C2833"/>
+                </a:solidFill>
+                <a:latin typeface="Arial" pitchFamily="34" charset="0"/>
+                <a:ea typeface="Arial" pitchFamily="34" charset="-122"/>
+                <a:cs typeface="Arial" pitchFamily="34" charset="-120"/>
+              </a:rPr>
+              <a:t>. They will declare themselves done at 50% and pull out a phone. Walk over. </a:t>
+            </a:r>
+            <a:pPr algn="l" indent="0" marL="0">
+              <a:lnSpc>
+                <a:spcPts val="1620"/>
+              </a:lnSpc>
+              <a:spcAft>
+                <a:spcPts val="300"/>
+              </a:spcAft>
+              <a:buNone/>
+            </a:pPr>
+            <a:r>
+              <a:rPr lang="en-US" sz="1200" i="1" dirty="0">
+                <a:solidFill>
+                  <a:srgbClr val="1C2833"/>
+                </a:solidFill>
+                <a:latin typeface="Arial" pitchFamily="34" charset="0"/>
+                <a:ea typeface="Arial" pitchFamily="34" charset="-122"/>
+                <a:cs typeface="Arial" pitchFamily="34" charset="-120"/>
+              </a:rPr>
+              <a:t>"What was your success criterion #2?"</a:t>
+            </a:r>
+            <a:pPr algn="l" indent="0" marL="0">
+              <a:lnSpc>
+                <a:spcPts val="1620"/>
+              </a:lnSpc>
+              <a:spcAft>
+                <a:spcPts val="300"/>
+              </a:spcAft>
+              <a:buNone/>
+            </a:pPr>
+            <a:r>
+              <a:rPr lang="en-US" sz="1200" dirty="0">
+                <a:solidFill>
+                  <a:srgbClr val="1C2833"/>
+                </a:solidFill>
+                <a:latin typeface="Arial" pitchFamily="34" charset="0"/>
+                <a:ea typeface="Arial" pitchFamily="34" charset="-122"/>
+                <a:cs typeface="Arial" pitchFamily="34" charset="-120"/>
+              </a:rPr>
+              <a:t> Make them say it. Then ask, </a:t>
+            </a:r>
+            <a:pPr algn="l" indent="0" marL="0">
+              <a:lnSpc>
+                <a:spcPts val="1620"/>
+              </a:lnSpc>
+              <a:spcAft>
+                <a:spcPts val="300"/>
+              </a:spcAft>
+              <a:buNone/>
+            </a:pPr>
+            <a:r>
+              <a:rPr lang="en-US" sz="1200" i="1" dirty="0">
+                <a:solidFill>
+                  <a:srgbClr val="1C2833"/>
+                </a:solidFill>
+                <a:latin typeface="Arial" pitchFamily="34" charset="0"/>
+                <a:ea typeface="Arial" pitchFamily="34" charset="-122"/>
+                <a:cs typeface="Arial" pitchFamily="34" charset="-120"/>
+              </a:rPr>
+              <a:t>"Is that visible in what you have?"</a:t>
+            </a:r>
+            <a:pPr algn="l" indent="0" marL="0">
+              <a:lnSpc>
+                <a:spcPts val="1620"/>
+              </a:lnSpc>
+              <a:spcAft>
+                <a:spcPts val="300"/>
+              </a:spcAft>
+              <a:buNone/>
+            </a:pPr>
+            <a:r>
+              <a:rPr lang="en-US" sz="1200" dirty="0">
+                <a:solidFill>
+                  <a:srgbClr val="1C2833"/>
+                </a:solidFill>
+                <a:latin typeface="Arial" pitchFamily="34" charset="0"/>
+                <a:ea typeface="Arial" pitchFamily="34" charset="-122"/>
+                <a:cs typeface="Arial" pitchFamily="34" charset="-120"/>
+              </a:rPr>
+              <a:t> Usually it isn't. Direct them to the next thing.</a:t>
+            </a:r>
+            <a:endParaRPr lang="en-US" sz="1200" dirty="0"/>
+          </a:p>
+          <a:p>
+            <a:pPr algn="l" marL="342900" indent="-342900">
+              <a:lnSpc>
+                <a:spcPts val="1620"/>
+              </a:lnSpc>
+              <a:spcAft>
+                <a:spcPts val="300"/>
+              </a:spcAft>
+              <a:buSzPct val="100000"/>
+              <a:buChar char="•"/>
+            </a:pPr>
+            <a:r>
+              <a:rPr lang="en-US" sz="1200" dirty="0">
+                <a:solidFill>
+                  <a:srgbClr val="1C2833"/>
+                </a:solidFill>
+                <a:latin typeface="Arial" pitchFamily="34" charset="0"/>
+                <a:ea typeface="Arial" pitchFamily="34" charset="-122"/>
+                <a:cs typeface="Arial" pitchFamily="34" charset="-120"/>
+              </a:rPr>
+              <a:t>Project 7 (sustainability audit) students should have all data collected by end of today. If not, the audit becomes a "what I'd measure if I had more time" piece — acceptable but flagged in the rubric.</a:t>
+            </a:r>
+            <a:endParaRPr lang="en-US" sz="1200" dirty="0"/>
+          </a:p>
+        </p:txBody>
+      </p:sp>
+      <p:sp>
+        <p:nvSpPr>
+          <p:cNvPr id="5" name="Text 3"/>
+          <p:cNvSpPr/>
+          <p:nvPr/>
+        </p:nvSpPr>
+        <p:spPr>
+          <a:xfrm>
+            <a:off x="406301" y="4434929"/>
+            <a:ext cx="8498026" cy="213271"/>
+          </a:xfrm>
+          <a:prstGeom prst="rect">
+            <a:avLst/>
+          </a:prstGeom>
+          <a:noFill/>
+          <a:ln/>
+        </p:spPr>
+        <p:txBody>
+          <a:bodyPr wrap="square" lIns="0" tIns="0" rIns="0" bIns="0" rtlCol="0" anchor="t"/>
+          <a:lstStyle/>
+          <a:p>
+            <a:pPr algn="l" indent="0" marL="0">
+              <a:lnSpc>
+                <a:spcPts val="1680"/>
+              </a:lnSpc>
+              <a:spcBef>
+                <a:spcPts val="300"/>
+              </a:spcBef>
+              <a:spcAft>
+                <a:spcPts val="300"/>
+              </a:spcAft>
+              <a:buNone/>
+            </a:pPr>
+            <a:r>
+              <a:rPr lang="en-US" sz="1200" dirty="0">
+                <a:solidFill>
+                  <a:srgbClr val="1C2833"/>
+                </a:solidFill>
+                <a:latin typeface="Arial" pitchFamily="34" charset="0"/>
+                <a:ea typeface="Arial" pitchFamily="34" charset="-122"/>
+                <a:cs typeface="Arial" pitchFamily="34" charset="-120"/>
+              </a:rPr>
+              <a:t>Middle ·  · IKS Curriculum</a:t>
+            </a:r>
+            <a:endParaRPr lang="en-US" sz="1200" dirty="0"/>
+          </a:p>
+        </p:txBody>
+      </p:sp>
+    </p:spTree>
+  </p:cSld>
+  <p:clrMapOvr>
+    <a:masterClrMapping/>
+  </p:clrMapOvr>
+</p:sld>
+</file>
+
+<file path=ppt/slides/slide15.xml><?xml version="1.0" encoding="utf-8"?>
+<p:sld xmlns:a="http://schemas.openxmlformats.org/drawingml/2006/main" xmlns:r="http://schemas.openxmlformats.org/officeDocument/2006/relationships" xmlns:p="http://schemas.openxmlformats.org/presentationml/2006/main">
+  <p:cSld name="Slide 15">
+    <p:bg>
+      <p:bgPr>
+        <a:solidFill>
+          <a:srgbClr val="FFFFFF"/>
+        </a:solidFill>
+      </p:bgPr>
+    </p:bg>
+    <p:spTree>
+      <p:nvGrpSpPr>
+        <p:cNvPr id="1" name=""/>
+        <p:cNvGrpSpPr/>
+        <p:nvPr/>
+      </p:nvGrpSpPr>
+      <p:grpSpPr>
+        <a:xfrm>
+          <a:off x="0" y="0"/>
+          <a:ext cx="0" cy="0"/>
+          <a:chOff x="0" y="0"/>
+          <a:chExt cx="0" cy="0"/>
+        </a:xfrm>
+      </p:grpSpPr>
+      <p:sp>
+        <p:nvSpPr>
+          <p:cNvPr id="2" name="Text 0"/>
+          <p:cNvSpPr/>
+          <p:nvPr/>
+        </p:nvSpPr>
+        <p:spPr>
+          <a:xfrm>
+            <a:off x="0" y="0"/>
+            <a:ext cx="9144000" cy="101501"/>
+          </a:xfrm>
+          <a:prstGeom prst="rect">
+            <a:avLst/>
+          </a:prstGeom>
+          <a:solidFill>
+            <a:srgbClr val="277884"/>
+          </a:solidFill>
+          <a:ln/>
+        </p:spPr>
+        <p:txBody>
+          <a:bodyPr wrap="square" rtlCol="0" anchor="ctr"/>
+          <a:lstStyle/>
+          <a:p>
+            <a:pPr indent="0" marL="0">
+              <a:buNone/>
+            </a:pPr>
+            <a:endParaRPr lang="en-US" dirty="0"/>
+          </a:p>
+        </p:txBody>
+      </p:sp>
+      <p:sp>
+        <p:nvSpPr>
+          <p:cNvPr id="3" name="Text 1"/>
+          <p:cNvSpPr/>
+          <p:nvPr/>
+        </p:nvSpPr>
+        <p:spPr>
+          <a:xfrm>
+            <a:off x="406301" y="457051"/>
+            <a:ext cx="8498026" cy="274290"/>
+          </a:xfrm>
+          <a:prstGeom prst="rect">
+            <a:avLst/>
+          </a:prstGeom>
+          <a:noFill/>
+          <a:ln/>
+        </p:spPr>
+        <p:txBody>
+          <a:bodyPr wrap="square" lIns="0" tIns="0" rIns="0" bIns="0" rtlCol="0" anchor="t"/>
+          <a:lstStyle/>
+          <a:p>
+            <a:pPr algn="l" indent="0" marL="0">
+              <a:lnSpc>
+                <a:spcPts val="2160"/>
+              </a:lnSpc>
+              <a:spcBef>
+                <a:spcPts val="600"/>
+              </a:spcBef>
+              <a:spcAft>
+                <a:spcPts val="800"/>
+              </a:spcAft>
+              <a:buNone/>
+            </a:pPr>
+            <a:r>
+              <a:rPr lang="en-US" sz="1800" b="1" dirty="0">
+                <a:solidFill>
+                  <a:srgbClr val="FE4447"/>
+                </a:solidFill>
+                <a:latin typeface="Georgia" pitchFamily="34" charset="0"/>
+                <a:ea typeface="Georgia" pitchFamily="34" charset="-122"/>
+                <a:cs typeface="Georgia" pitchFamily="34" charset="-120"/>
+              </a:rPr>
+              <a:t>Teacher notes (cont.)</a:t>
+            </a:r>
+            <a:endParaRPr lang="en-US" sz="1800" dirty="0"/>
+          </a:p>
+        </p:txBody>
+      </p:sp>
+      <p:sp>
+        <p:nvSpPr>
+          <p:cNvPr id="4" name="Text 2"/>
+          <p:cNvSpPr/>
+          <p:nvPr/>
+        </p:nvSpPr>
+        <p:spPr>
+          <a:xfrm>
+            <a:off x="634901" y="883593"/>
+            <a:ext cx="8102798" cy="937022"/>
+          </a:xfrm>
+          <a:prstGeom prst="rect">
+            <a:avLst/>
+          </a:prstGeom>
+          <a:noFill/>
+          <a:ln/>
+        </p:spPr>
+        <p:txBody>
+          <a:bodyPr wrap="square" lIns="0" tIns="0" rIns="0" bIns="0" rtlCol="0" anchor="t"/>
+          <a:lstStyle/>
+          <a:p>
+            <a:pPr algn="l" marL="342900" indent="-342900">
+              <a:lnSpc>
+                <a:spcPts val="1620"/>
+              </a:lnSpc>
+              <a:spcAft>
+                <a:spcPts val="300"/>
+              </a:spcAft>
+              <a:buSzPct val="100000"/>
+              <a:buChar char="•"/>
+            </a:pPr>
+            <a:r>
+              <a:rPr lang="en-US" sz="1200" dirty="0">
+                <a:solidFill>
+                  <a:srgbClr val="1C2833"/>
+                </a:solidFill>
+                <a:latin typeface="Arial" pitchFamily="34" charset="0"/>
+                <a:ea typeface="Arial" pitchFamily="34" charset="-122"/>
+                <a:cs typeface="Arial" pitchFamily="34" charset="-120"/>
+              </a:rPr>
+              <a:t>Project 8 (doṣa self-study) students who started their 7-day journal on Day 1 should have 7 entries by today. Students who started later have fewer — that's the cut, and they reflect on it.</a:t>
+            </a:r>
+            <a:endParaRPr lang="en-US" sz="1200" dirty="0"/>
+          </a:p>
+          <a:p>
+            <a:pPr algn="l" marL="342900" indent="-342900">
+              <a:lnSpc>
+                <a:spcPts val="1620"/>
+              </a:lnSpc>
+              <a:spcAft>
+                <a:spcPts val="300"/>
+              </a:spcAft>
+              <a:buSzPct val="100000"/>
+              <a:buChar char="•"/>
+            </a:pPr>
+            <a:r>
+              <a:rPr lang="en-US" sz="1200" dirty="0">
+                <a:solidFill>
+                  <a:srgbClr val="1C2833"/>
+                </a:solidFill>
+                <a:latin typeface="Arial" pitchFamily="34" charset="0"/>
+                <a:ea typeface="Arial" pitchFamily="34" charset="-122"/>
+                <a:cs typeface="Arial" pitchFamily="34" charset="-120"/>
+              </a:rPr>
+              <a:t>Project 9 (multiplication comparison) students should have all timed problems done; today is for tabulating means and writing the one-paragraph conclusion.</a:t>
+            </a:r>
+            <a:endParaRPr lang="en-US" sz="1200" dirty="0"/>
+          </a:p>
+        </p:txBody>
+      </p:sp>
+      <p:sp>
+        <p:nvSpPr>
+          <p:cNvPr id="5" name="Text 3"/>
+          <p:cNvSpPr/>
+          <p:nvPr/>
+        </p:nvSpPr>
+        <p:spPr>
+          <a:xfrm>
+            <a:off x="406301" y="4434929"/>
+            <a:ext cx="8498026" cy="213271"/>
+          </a:xfrm>
+          <a:prstGeom prst="rect">
+            <a:avLst/>
+          </a:prstGeom>
+          <a:noFill/>
+          <a:ln/>
+        </p:spPr>
+        <p:txBody>
+          <a:bodyPr wrap="square" lIns="0" tIns="0" rIns="0" bIns="0" rtlCol="0" anchor="t"/>
+          <a:lstStyle/>
+          <a:p>
+            <a:pPr algn="l" indent="0" marL="0">
+              <a:lnSpc>
+                <a:spcPts val="1680"/>
+              </a:lnSpc>
+              <a:spcBef>
+                <a:spcPts val="300"/>
+              </a:spcBef>
+              <a:spcAft>
+                <a:spcPts val="300"/>
+              </a:spcAft>
+              <a:buNone/>
+            </a:pPr>
+            <a:r>
+              <a:rPr lang="en-US" sz="1200" dirty="0">
+                <a:solidFill>
+                  <a:srgbClr val="1C2833"/>
+                </a:solidFill>
+                <a:latin typeface="Arial" pitchFamily="34" charset="0"/>
+                <a:ea typeface="Arial" pitchFamily="34" charset="-122"/>
+                <a:cs typeface="Arial" pitchFamily="34" charset="-120"/>
+              </a:rPr>
+              <a:t>Middle ·  · IKS Curriculum</a:t>
+            </a:r>
+            <a:endParaRPr lang="en-US" sz="1200" dirty="0"/>
+          </a:p>
+        </p:txBody>
+      </p:sp>
+    </p:spTree>
+  </p:cSld>
+  <p:clrMapOvr>
+    <a:masterClrMapping/>
+  </p:clrMapOvr>
+</p:sld>
+</file>
+
+<file path=ppt/slides/slide16.xml><?xml version="1.0" encoding="utf-8"?>
+<p:sld xmlns:a="http://schemas.openxmlformats.org/drawingml/2006/main" xmlns:r="http://schemas.openxmlformats.org/officeDocument/2006/relationships" xmlns:p="http://schemas.openxmlformats.org/presentationml/2006/main">
+  <p:cSld name="Slide 16">
+    <p:bg>
+      <p:bgPr>
+        <a:solidFill>
+          <a:srgbClr val="FFFFFF"/>
+        </a:solidFill>
+      </p:bgPr>
+    </p:bg>
+    <p:spTree>
+      <p:nvGrpSpPr>
+        <p:cNvPr id="1" name=""/>
+        <p:cNvGrpSpPr/>
+        <p:nvPr/>
+      </p:nvGrpSpPr>
+      <p:grpSpPr>
+        <a:xfrm>
+          <a:off x="0" y="0"/>
+          <a:ext cx="0" cy="0"/>
+          <a:chOff x="0" y="0"/>
+          <a:chExt cx="0" cy="0"/>
+        </a:xfrm>
+      </p:grpSpPr>
+      <p:sp>
+        <p:nvSpPr>
+          <p:cNvPr id="2" name="Text 0"/>
+          <p:cNvSpPr/>
+          <p:nvPr/>
+        </p:nvSpPr>
+        <p:spPr>
+          <a:xfrm>
+            <a:off x="0" y="0"/>
+            <a:ext cx="9144000" cy="101501"/>
+          </a:xfrm>
+          <a:prstGeom prst="rect">
+            <a:avLst/>
+          </a:prstGeom>
+          <a:solidFill>
+            <a:srgbClr val="277884"/>
+          </a:solidFill>
+          <a:ln/>
+        </p:spPr>
+        <p:txBody>
+          <a:bodyPr wrap="square" rtlCol="0" anchor="ctr"/>
+          <a:lstStyle/>
+          <a:p>
+            <a:pPr indent="0" marL="0">
+              <a:buNone/>
+            </a:pPr>
+            <a:endParaRPr lang="en-US" dirty="0"/>
+          </a:p>
+        </p:txBody>
+      </p:sp>
+      <p:sp>
+        <p:nvSpPr>
+          <p:cNvPr id="3" name="Text 1"/>
+          <p:cNvSpPr/>
+          <p:nvPr/>
+        </p:nvSpPr>
+        <p:spPr>
+          <a:xfrm>
+            <a:off x="406301" y="457051"/>
+            <a:ext cx="8498026" cy="274290"/>
+          </a:xfrm>
+          <a:prstGeom prst="rect">
+            <a:avLst/>
+          </a:prstGeom>
+          <a:noFill/>
+          <a:ln/>
+        </p:spPr>
+        <p:txBody>
+          <a:bodyPr wrap="square" lIns="0" tIns="0" rIns="0" bIns="0" rtlCol="0" anchor="t"/>
+          <a:lstStyle/>
+          <a:p>
+            <a:pPr algn="l" indent="0" marL="0">
+              <a:lnSpc>
+                <a:spcPts val="2160"/>
+              </a:lnSpc>
+              <a:spcBef>
+                <a:spcPts val="600"/>
+              </a:spcBef>
+              <a:spcAft>
+                <a:spcPts val="800"/>
+              </a:spcAft>
+              <a:buNone/>
+            </a:pPr>
+            <a:r>
+              <a:rPr lang="en-US" sz="1800" b="1" dirty="0">
+                <a:solidFill>
+                  <a:srgbClr val="FE4447"/>
+                </a:solidFill>
+                <a:latin typeface="Georgia" pitchFamily="34" charset="0"/>
+                <a:ea typeface="Georgia" pitchFamily="34" charset="-122"/>
+                <a:cs typeface="Georgia" pitchFamily="34" charset="-120"/>
+              </a:rPr>
+              <a:t>Common stuck-points (continued from Day 6)</a:t>
             </a:r>
             <a:endParaRPr lang="en-US" sz="1800" dirty="0"/>
           </a:p>
@@ -3964,6 +4930,54 @@
               <a:buNone/>
             </a:pPr>
             <a:r>
+              <a:rPr lang="en-US" sz="1200" i="1" dirty="0">
+                <a:solidFill>
+                  <a:srgbClr val="1C2833"/>
+                </a:solidFill>
+                <a:latin typeface="Arial" pitchFamily="34" charset="0"/>
+                <a:ea typeface="Arial" pitchFamily="34" charset="-122"/>
+                <a:cs typeface="Arial" pitchFamily="34" charset="-120"/>
+              </a:rPr>
+              <a:t>Each row: Stuck on · Quick unblock.</a:t>
+            </a:r>
+            <a:endParaRPr lang="en-US" sz="1200" dirty="0"/>
+          </a:p>
+        </p:txBody>
+      </p:sp>
+      <p:sp>
+        <p:nvSpPr>
+          <p:cNvPr id="5" name="Text 3"/>
+          <p:cNvSpPr/>
+          <p:nvPr/>
+        </p:nvSpPr>
+        <p:spPr>
+          <a:xfrm>
+            <a:off x="406301" y="4434929"/>
+            <a:ext cx="8498026" cy="213271"/>
+          </a:xfrm>
+          <a:prstGeom prst="rect">
+            <a:avLst/>
+          </a:prstGeom>
+          <a:noFill/>
+          <a:ln/>
+        </p:spPr>
+        <p:txBody>
+          <a:bodyPr wrap="square" lIns="0" tIns="0" rIns="0" bIns="0" rtlCol="0" anchor="t"/>
+          <a:lstStyle/>
+          <a:p>
+            <a:pPr algn="l" indent="0" marL="0">
+              <a:lnSpc>
+                <a:spcPts val="1680"/>
+              </a:lnSpc>
+              <a:spcBef>
+                <a:spcPts val="300"/>
+              </a:spcBef>
+              <a:spcAft>
+                <a:spcPts val="300"/>
+              </a:spcAft>
+              <a:buNone/>
+            </a:pPr>
+            <a:r>
               <a:rPr lang="en-US" sz="1200" dirty="0">
                 <a:solidFill>
                   <a:srgbClr val="1C2833"/>
@@ -3972,7 +4986,519 @@
                 <a:ea typeface="Arial" pitchFamily="34" charset="-122"/>
                 <a:cs typeface="Arial" pitchFamily="34" charset="-120"/>
               </a:rPr>
-              <a:t>– No new citation. Build day.</a:t>
+              <a:t>Middle ·  · IKS Curriculum</a:t>
+            </a:r>
+            <a:endParaRPr lang="en-US" sz="1200" dirty="0"/>
+          </a:p>
+        </p:txBody>
+      </p:sp>
+    </p:spTree>
+  </p:cSld>
+  <p:clrMapOvr>
+    <a:masterClrMapping/>
+  </p:clrMapOvr>
+</p:sld>
+</file>
+
+<file path=ppt/slides/slide17.xml><?xml version="1.0" encoding="utf-8"?>
+<p:sld xmlns:a="http://schemas.openxmlformats.org/drawingml/2006/main" xmlns:r="http://schemas.openxmlformats.org/officeDocument/2006/relationships" xmlns:p="http://schemas.openxmlformats.org/presentationml/2006/main">
+  <p:cSld name="Slide 17">
+    <p:bg>
+      <p:bgPr>
+        <a:solidFill>
+          <a:srgbClr val="FFFFFF"/>
+        </a:solidFill>
+      </p:bgPr>
+    </p:bg>
+    <p:spTree>
+      <p:nvGrpSpPr>
+        <p:cNvPr id="1" name=""/>
+        <p:cNvGrpSpPr/>
+        <p:nvPr/>
+      </p:nvGrpSpPr>
+      <p:grpSpPr>
+        <a:xfrm>
+          <a:off x="0" y="0"/>
+          <a:ext cx="0" cy="0"/>
+          <a:chOff x="0" y="0"/>
+          <a:chExt cx="0" cy="0"/>
+        </a:xfrm>
+      </p:grpSpPr>
+      <p:sp>
+        <p:nvSpPr>
+          <p:cNvPr id="2" name="Text 0"/>
+          <p:cNvSpPr/>
+          <p:nvPr/>
+        </p:nvSpPr>
+        <p:spPr>
+          <a:xfrm>
+            <a:off x="0" y="0"/>
+            <a:ext cx="9144000" cy="101501"/>
+          </a:xfrm>
+          <a:prstGeom prst="rect">
+            <a:avLst/>
+          </a:prstGeom>
+          <a:solidFill>
+            <a:srgbClr val="277884"/>
+          </a:solidFill>
+          <a:ln/>
+        </p:spPr>
+        <p:txBody>
+          <a:bodyPr wrap="square" rtlCol="0" anchor="ctr"/>
+          <a:lstStyle/>
+          <a:p>
+            <a:pPr indent="0" marL="0">
+              <a:buNone/>
+            </a:pPr>
+            <a:endParaRPr lang="en-US" dirty="0"/>
+          </a:p>
+        </p:txBody>
+      </p:sp>
+      <p:sp>
+        <p:nvSpPr>
+          <p:cNvPr id="3" name="Text 1"/>
+          <p:cNvSpPr/>
+          <p:nvPr/>
+        </p:nvSpPr>
+        <p:spPr>
+          <a:xfrm>
+            <a:off x="406301" y="457051"/>
+            <a:ext cx="8498026" cy="274290"/>
+          </a:xfrm>
+          <a:prstGeom prst="rect">
+            <a:avLst/>
+          </a:prstGeom>
+          <a:noFill/>
+          <a:ln/>
+        </p:spPr>
+        <p:txBody>
+          <a:bodyPr wrap="square" lIns="0" tIns="0" rIns="0" bIns="0" rtlCol="0" anchor="t"/>
+          <a:lstStyle/>
+          <a:p>
+            <a:pPr algn="l" indent="0" marL="0">
+              <a:lnSpc>
+                <a:spcPts val="2160"/>
+              </a:lnSpc>
+              <a:spcBef>
+                <a:spcPts val="600"/>
+              </a:spcBef>
+              <a:spcAft>
+                <a:spcPts val="800"/>
+              </a:spcAft>
+              <a:buNone/>
+            </a:pPr>
+            <a:r>
+              <a:rPr lang="en-US" sz="1800" b="1" dirty="0">
+                <a:solidFill>
+                  <a:srgbClr val="FE4447"/>
+                </a:solidFill>
+                <a:latin typeface="Georgia" pitchFamily="34" charset="0"/>
+                <a:ea typeface="Georgia" pitchFamily="34" charset="-122"/>
+                <a:cs typeface="Georgia" pitchFamily="34" charset="-120"/>
+              </a:rPr>
+              <a:t>Common stuck-points (continued from Day 6) (cont.)</a:t>
+            </a:r>
+            <a:endParaRPr lang="en-US" sz="1800" dirty="0"/>
+          </a:p>
+        </p:txBody>
+      </p:sp>
+      <p:sp>
+        <p:nvSpPr>
+          <p:cNvPr id="4" name="Text 2"/>
+          <p:cNvSpPr/>
+          <p:nvPr/>
+        </p:nvSpPr>
+        <p:spPr>
+          <a:xfrm>
+            <a:off x="634901" y="883593"/>
+            <a:ext cx="8102798" cy="1013222"/>
+          </a:xfrm>
+          <a:prstGeom prst="rect">
+            <a:avLst/>
+          </a:prstGeom>
+          <a:noFill/>
+          <a:ln/>
+        </p:spPr>
+        <p:txBody>
+          <a:bodyPr wrap="square" lIns="0" tIns="0" rIns="0" bIns="0" rtlCol="0" anchor="t"/>
+          <a:lstStyle/>
+          <a:p>
+            <a:pPr algn="l" marL="342900" indent="-342900">
+              <a:lnSpc>
+                <a:spcPts val="1620"/>
+              </a:lnSpc>
+              <a:spcAft>
+                <a:spcPts val="300"/>
+              </a:spcAft>
+              <a:buSzPct val="100000"/>
+              <a:buChar char="•"/>
+            </a:pPr>
+            <a:r>
+              <a:rPr lang="en-US" sz="1200" b="1" dirty="0">
+                <a:solidFill>
+                  <a:srgbClr val="1C2833"/>
+                </a:solidFill>
+                <a:latin typeface="Arial" pitchFamily="34" charset="0"/>
+                <a:ea typeface="Arial" pitchFamily="34" charset="-122"/>
+                <a:cs typeface="Arial" pitchFamily="34" charset="-120"/>
+              </a:rPr>
+              <a:t>"It looks ugly"</a:t>
+            </a:r>
+            <a:pPr algn="l" indent="0" marL="0">
+              <a:lnSpc>
+                <a:spcPts val="1620"/>
+              </a:lnSpc>
+              <a:spcAft>
+                <a:spcPts val="300"/>
+              </a:spcAft>
+              <a:buNone/>
+            </a:pPr>
+            <a:r>
+              <a:rPr lang="en-US" sz="1200" dirty="0">
+                <a:solidFill>
+                  <a:srgbClr val="1C2833"/>
+                </a:solidFill>
+                <a:latin typeface="Arial" pitchFamily="34" charset="0"/>
+                <a:ea typeface="Arial" pitchFamily="34" charset="-122"/>
+                <a:cs typeface="Arial" pitchFamily="34" charset="-120"/>
+              </a:rPr>
+              <a:t> — Aesthetics are 1 line of the rubric, not 6. Move on.</a:t>
+            </a:r>
+            <a:endParaRPr lang="en-US" sz="1200" dirty="0"/>
+          </a:p>
+          <a:p>
+            <a:pPr algn="l" marL="342900" indent="-342900">
+              <a:lnSpc>
+                <a:spcPts val="1620"/>
+              </a:lnSpc>
+              <a:spcAft>
+                <a:spcPts val="300"/>
+              </a:spcAft>
+              <a:buSzPct val="100000"/>
+              <a:buChar char="•"/>
+            </a:pPr>
+            <a:r>
+              <a:rPr lang="en-US" sz="1200" b="1" dirty="0">
+                <a:solidFill>
+                  <a:srgbClr val="1C2833"/>
+                </a:solidFill>
+                <a:latin typeface="Arial" pitchFamily="34" charset="0"/>
+                <a:ea typeface="Arial" pitchFamily="34" charset="-122"/>
+                <a:cs typeface="Arial" pitchFamily="34" charset="-120"/>
+              </a:rPr>
+              <a:t>"I have too many citations on one page"</a:t>
+            </a:r>
+            <a:pPr algn="l" indent="0" marL="0">
+              <a:lnSpc>
+                <a:spcPts val="1620"/>
+              </a:lnSpc>
+              <a:spcAft>
+                <a:spcPts val="300"/>
+              </a:spcAft>
+              <a:buNone/>
+            </a:pPr>
+            <a:r>
+              <a:rPr lang="en-US" sz="1200" dirty="0">
+                <a:solidFill>
+                  <a:srgbClr val="1C2833"/>
+                </a:solidFill>
+                <a:latin typeface="Arial" pitchFamily="34" charset="0"/>
+                <a:ea typeface="Arial" pitchFamily="34" charset="-122"/>
+                <a:cs typeface="Arial" pitchFamily="34" charset="-120"/>
+              </a:rPr>
+              <a:t> — Footnote them; only the strongest one needs to be in the body.</a:t>
+            </a:r>
+            <a:endParaRPr lang="en-US" sz="1200" dirty="0"/>
+          </a:p>
+          <a:p>
+            <a:pPr algn="l" marL="342900" indent="-342900">
+              <a:lnSpc>
+                <a:spcPts val="1620"/>
+              </a:lnSpc>
+              <a:spcAft>
+                <a:spcPts val="300"/>
+              </a:spcAft>
+              <a:buSzPct val="100000"/>
+              <a:buChar char="•"/>
+            </a:pPr>
+            <a:r>
+              <a:rPr lang="en-US" sz="1200" b="1" dirty="0">
+                <a:solidFill>
+                  <a:srgbClr val="1C2833"/>
+                </a:solidFill>
+                <a:latin typeface="Arial" pitchFamily="34" charset="0"/>
+                <a:ea typeface="Arial" pitchFamily="34" charset="-122"/>
+                <a:cs typeface="Arial" pitchFamily="34" charset="-120"/>
+              </a:rPr>
+              <a:t>"My partner finished before me"</a:t>
+            </a:r>
+            <a:pPr algn="l" indent="0" marL="0">
+              <a:lnSpc>
+                <a:spcPts val="1620"/>
+              </a:lnSpc>
+              <a:spcAft>
+                <a:spcPts val="300"/>
+              </a:spcAft>
+              <a:buNone/>
+            </a:pPr>
+            <a:r>
+              <a:rPr lang="en-US" sz="1200" dirty="0">
+                <a:solidFill>
+                  <a:srgbClr val="1C2833"/>
+                </a:solidFill>
+                <a:latin typeface="Arial" pitchFamily="34" charset="0"/>
+                <a:ea typeface="Arial" pitchFamily="34" charset="-122"/>
+                <a:cs typeface="Arial" pitchFamily="34" charset="-120"/>
+              </a:rPr>
+              <a:t> — Re-divide. They help on the final 20% in a new role.</a:t>
+            </a:r>
+            <a:endParaRPr lang="en-US" sz="1200" dirty="0"/>
+          </a:p>
+          <a:p>
+            <a:pPr algn="l" marL="342900" indent="-342900">
+              <a:lnSpc>
+                <a:spcPts val="1620"/>
+              </a:lnSpc>
+              <a:spcAft>
+                <a:spcPts val="300"/>
+              </a:spcAft>
+              <a:buSzPct val="100000"/>
+              <a:buChar char="•"/>
+            </a:pPr>
+            <a:r>
+              <a:rPr lang="en-US" sz="1200" b="1" dirty="0">
+                <a:solidFill>
+                  <a:srgbClr val="1C2833"/>
+                </a:solidFill>
+                <a:latin typeface="Arial" pitchFamily="34" charset="0"/>
+                <a:ea typeface="Arial" pitchFamily="34" charset="-122"/>
+                <a:cs typeface="Arial" pitchFamily="34" charset="-120"/>
+              </a:rPr>
+              <a:t>"I want to redo it"</a:t>
+            </a:r>
+            <a:pPr algn="l" indent="0" marL="0">
+              <a:lnSpc>
+                <a:spcPts val="1620"/>
+              </a:lnSpc>
+              <a:spcAft>
+                <a:spcPts val="300"/>
+              </a:spcAft>
+              <a:buNone/>
+            </a:pPr>
+            <a:r>
+              <a:rPr lang="en-US" sz="1200" dirty="0">
+                <a:solidFill>
+                  <a:srgbClr val="1C2833"/>
+                </a:solidFill>
+                <a:latin typeface="Arial" pitchFamily="34" charset="0"/>
+                <a:ea typeface="Arial" pitchFamily="34" charset="-122"/>
+                <a:cs typeface="Arial" pitchFamily="34" charset="-120"/>
+              </a:rPr>
+              <a:t> — No. The rubric rewards iteration on what exists, not restarts.</a:t>
+            </a:r>
+            <a:endParaRPr lang="en-US" sz="1200" dirty="0"/>
+          </a:p>
+        </p:txBody>
+      </p:sp>
+      <p:sp>
+        <p:nvSpPr>
+          <p:cNvPr id="5" name="Text 3"/>
+          <p:cNvSpPr/>
+          <p:nvPr/>
+        </p:nvSpPr>
+        <p:spPr>
+          <a:xfrm>
+            <a:off x="406301" y="4434929"/>
+            <a:ext cx="8498026" cy="213271"/>
+          </a:xfrm>
+          <a:prstGeom prst="rect">
+            <a:avLst/>
+          </a:prstGeom>
+          <a:noFill/>
+          <a:ln/>
+        </p:spPr>
+        <p:txBody>
+          <a:bodyPr wrap="square" lIns="0" tIns="0" rIns="0" bIns="0" rtlCol="0" anchor="t"/>
+          <a:lstStyle/>
+          <a:p>
+            <a:pPr algn="l" indent="0" marL="0">
+              <a:lnSpc>
+                <a:spcPts val="1680"/>
+              </a:lnSpc>
+              <a:spcBef>
+                <a:spcPts val="300"/>
+              </a:spcBef>
+              <a:spcAft>
+                <a:spcPts val="300"/>
+              </a:spcAft>
+              <a:buNone/>
+            </a:pPr>
+            <a:r>
+              <a:rPr lang="en-US" sz="1200" dirty="0">
+                <a:solidFill>
+                  <a:srgbClr val="1C2833"/>
+                </a:solidFill>
+                <a:latin typeface="Arial" pitchFamily="34" charset="0"/>
+                <a:ea typeface="Arial" pitchFamily="34" charset="-122"/>
+                <a:cs typeface="Arial" pitchFamily="34" charset="-120"/>
+              </a:rPr>
+              <a:t>Middle ·  · IKS Curriculum</a:t>
+            </a:r>
+            <a:endParaRPr lang="en-US" sz="1200" dirty="0"/>
+          </a:p>
+        </p:txBody>
+      </p:sp>
+    </p:spTree>
+  </p:cSld>
+  <p:clrMapOvr>
+    <a:masterClrMapping/>
+  </p:clrMapOvr>
+</p:sld>
+</file>
+
+<file path=ppt/slides/slide18.xml><?xml version="1.0" encoding="utf-8"?>
+<p:sld xmlns:a="http://schemas.openxmlformats.org/drawingml/2006/main" xmlns:r="http://schemas.openxmlformats.org/officeDocument/2006/relationships" xmlns:p="http://schemas.openxmlformats.org/presentationml/2006/main">
+  <p:cSld name="Slide 18">
+    <p:bg>
+      <p:bgPr>
+        <a:solidFill>
+          <a:srgbClr val="FFFFFF"/>
+        </a:solidFill>
+      </p:bgPr>
+    </p:bg>
+    <p:spTree>
+      <p:nvGrpSpPr>
+        <p:cNvPr id="1" name=""/>
+        <p:cNvGrpSpPr/>
+        <p:nvPr/>
+      </p:nvGrpSpPr>
+      <p:grpSpPr>
+        <a:xfrm>
+          <a:off x="0" y="0"/>
+          <a:ext cx="0" cy="0"/>
+          <a:chOff x="0" y="0"/>
+          <a:chExt cx="0" cy="0"/>
+        </a:xfrm>
+      </p:grpSpPr>
+      <p:sp>
+        <p:nvSpPr>
+          <p:cNvPr id="2" name="Text 0"/>
+          <p:cNvSpPr/>
+          <p:nvPr/>
+        </p:nvSpPr>
+        <p:spPr>
+          <a:xfrm>
+            <a:off x="0" y="0"/>
+            <a:ext cx="9144000" cy="101501"/>
+          </a:xfrm>
+          <a:prstGeom prst="rect">
+            <a:avLst/>
+          </a:prstGeom>
+          <a:solidFill>
+            <a:srgbClr val="277884"/>
+          </a:solidFill>
+          <a:ln/>
+        </p:spPr>
+        <p:txBody>
+          <a:bodyPr wrap="square" rtlCol="0" anchor="ctr"/>
+          <a:lstStyle/>
+          <a:p>
+            <a:pPr indent="0" marL="0">
+              <a:buNone/>
+            </a:pPr>
+            <a:endParaRPr lang="en-US" dirty="0"/>
+          </a:p>
+        </p:txBody>
+      </p:sp>
+      <p:sp>
+        <p:nvSpPr>
+          <p:cNvPr id="3" name="Text 1"/>
+          <p:cNvSpPr/>
+          <p:nvPr/>
+        </p:nvSpPr>
+        <p:spPr>
+          <a:xfrm>
+            <a:off x="406301" y="457051"/>
+            <a:ext cx="8498026" cy="274290"/>
+          </a:xfrm>
+          <a:prstGeom prst="rect">
+            <a:avLst/>
+          </a:prstGeom>
+          <a:noFill/>
+          <a:ln/>
+        </p:spPr>
+        <p:txBody>
+          <a:bodyPr wrap="square" lIns="0" tIns="0" rIns="0" bIns="0" rtlCol="0" anchor="t"/>
+          <a:lstStyle/>
+          <a:p>
+            <a:pPr algn="l" indent="0" marL="0">
+              <a:lnSpc>
+                <a:spcPts val="2160"/>
+              </a:lnSpc>
+              <a:spcBef>
+                <a:spcPts val="600"/>
+              </a:spcBef>
+              <a:spcAft>
+                <a:spcPts val="800"/>
+              </a:spcAft>
+              <a:buNone/>
+            </a:pPr>
+            <a:r>
+              <a:rPr lang="en-US" sz="1800" b="1" dirty="0">
+                <a:solidFill>
+                  <a:srgbClr val="FE4447"/>
+                </a:solidFill>
+                <a:latin typeface="Georgia" pitchFamily="34" charset="0"/>
+                <a:ea typeface="Georgia" pitchFamily="34" charset="-122"/>
+                <a:cs typeface="Georgia" pitchFamily="34" charset="-120"/>
+              </a:rPr>
+              <a:t>Citation(s) used in this lesson</a:t>
+            </a:r>
+            <a:endParaRPr lang="en-US" sz="1800" dirty="0"/>
+          </a:p>
+        </p:txBody>
+      </p:sp>
+      <p:sp>
+        <p:nvSpPr>
+          <p:cNvPr id="4" name="Text 2"/>
+          <p:cNvSpPr/>
+          <p:nvPr/>
+        </p:nvSpPr>
+        <p:spPr>
+          <a:xfrm>
+            <a:off x="634901" y="883593"/>
+            <a:ext cx="8102798" cy="281880"/>
+          </a:xfrm>
+          <a:prstGeom prst="rect">
+            <a:avLst/>
+          </a:prstGeom>
+          <a:noFill/>
+          <a:ln/>
+        </p:spPr>
+        <p:txBody>
+          <a:bodyPr wrap="square" lIns="0" tIns="0" rIns="0" bIns="0" rtlCol="0" anchor="t"/>
+          <a:lstStyle/>
+          <a:p>
+            <a:pPr algn="l" marL="342900" indent="-342900">
+              <a:lnSpc>
+                <a:spcPts val="1620"/>
+              </a:lnSpc>
+              <a:spcAft>
+                <a:spcPts val="300"/>
+              </a:spcAft>
+              <a:buSzPct val="100000"/>
+              <a:buChar char="•"/>
+            </a:pPr>
+            <a:r>
+              <a:rPr lang="en-US" sz="1200" dirty="0">
+                <a:solidFill>
+                  <a:srgbClr val="1C2833"/>
+                </a:solidFill>
+                <a:latin typeface="Arial" pitchFamily="34" charset="0"/>
+                <a:ea typeface="Arial" pitchFamily="34" charset="-122"/>
+                <a:cs typeface="Arial" pitchFamily="34" charset="-120"/>
+              </a:rPr>
+              <a:t>No new citation. Build day.</a:t>
             </a:r>
             <a:endParaRPr lang="en-US" sz="1200" dirty="0"/>
           </a:p>
@@ -4130,7 +5656,7 @@
                 <a:ea typeface="Georgia" pitchFamily="34" charset="-122"/>
                 <a:cs typeface="Georgia" pitchFamily="34" charset="-120"/>
               </a:rPr>
-              <a:t>Materials</a:t>
+              <a:t>Learning objective</a:t>
             </a:r>
             <a:endParaRPr lang="en-US" sz="1800" dirty="0"/>
           </a:p>
@@ -4178,7 +5704,53 @@
                 <a:ea typeface="Arial" pitchFamily="34" charset="-122"/>
                 <a:cs typeface="Arial" pitchFamily="34" charset="-120"/>
               </a:rPr>
-              <a:t>– Everything from Day 6 (students bring back their own) – Class supply bin – Timer visible – Small "finisher" supplies: laminating pouches (optional), card-binding rings, larger sheets for poster mounting</a:t>
+              <a:t>By the end of this lesson, students will have a </a:t>
+            </a:r>
+            <a:pPr algn="l" indent="0" marL="0">
+              <a:lnSpc>
+                <a:spcPts val="1680"/>
+              </a:lnSpc>
+              <a:spcBef>
+                <a:spcPts val="300"/>
+              </a:spcBef>
+              <a:spcAft>
+                <a:spcPts val="300"/>
+              </a:spcAft>
+              <a:buNone/>
+            </a:pPr>
+            <a:r>
+              <a:rPr lang="en-US" sz="1200" b="1" dirty="0">
+                <a:solidFill>
+                  <a:srgbClr val="1C2833"/>
+                </a:solidFill>
+                <a:latin typeface="Arial" pitchFamily="34" charset="0"/>
+                <a:ea typeface="Arial" pitchFamily="34" charset="-122"/>
+                <a:cs typeface="Arial" pitchFamily="34" charset="-120"/>
+              </a:rPr>
+              <a:t>substantially complete</a:t>
+            </a:r>
+            <a:pPr algn="l" indent="0" marL="0">
+              <a:lnSpc>
+                <a:spcPts val="1680"/>
+              </a:lnSpc>
+              <a:spcBef>
+                <a:spcPts val="300"/>
+              </a:spcBef>
+              <a:spcAft>
+                <a:spcPts val="300"/>
+              </a:spcAft>
+              <a:buNone/>
+            </a:pPr>
+            <a:r>
+              <a:rPr lang="en-US" sz="1200" dirty="0">
+                <a:solidFill>
+                  <a:srgbClr val="1C2833"/>
+                </a:solidFill>
+                <a:latin typeface="Arial" pitchFamily="34" charset="0"/>
+                <a:ea typeface="Arial" pitchFamily="34" charset="-122"/>
+                <a:cs typeface="Arial" pitchFamily="34" charset="-120"/>
+              </a:rPr>
+              <a:t> final artefact — at least 80% finished, with only refinements (not rewrites) remaining for the documentation and rehearsal days.</a:t>
             </a:r>
             <a:endParaRPr lang="en-US" sz="1200" dirty="0"/>
           </a:p>
@@ -4336,7 +5908,7 @@
                 <a:ea typeface="Georgia" pitchFamily="34" charset="-122"/>
                 <a:cs typeface="Georgia" pitchFamily="34" charset="-120"/>
               </a:rPr>
-              <a:t>Lesson flow</a:t>
+              <a:t>Materials</a:t>
             </a:r>
             <a:endParaRPr lang="en-US" sz="1800" dirty="0"/>
           </a:p>
@@ -4345,6 +5917,124 @@
       <p:sp>
         <p:nvSpPr>
           <p:cNvPr id="4" name="Text 2"/>
+          <p:cNvSpPr/>
+          <p:nvPr/>
+        </p:nvSpPr>
+        <p:spPr>
+          <a:xfrm>
+            <a:off x="634901" y="883593"/>
+            <a:ext cx="8102798" cy="1013222"/>
+          </a:xfrm>
+          <a:prstGeom prst="rect">
+            <a:avLst/>
+          </a:prstGeom>
+          <a:noFill/>
+          <a:ln/>
+        </p:spPr>
+        <p:txBody>
+          <a:bodyPr wrap="square" lIns="0" tIns="0" rIns="0" bIns="0" rtlCol="0" anchor="t"/>
+          <a:lstStyle/>
+          <a:p>
+            <a:pPr algn="l" marL="342900" indent="-342900">
+              <a:lnSpc>
+                <a:spcPts val="1620"/>
+              </a:lnSpc>
+              <a:spcAft>
+                <a:spcPts val="300"/>
+              </a:spcAft>
+              <a:buSzPct val="100000"/>
+              <a:buChar char="•"/>
+            </a:pPr>
+            <a:r>
+              <a:rPr lang="en-US" sz="1200" dirty="0">
+                <a:solidFill>
+                  <a:srgbClr val="1C2833"/>
+                </a:solidFill>
+                <a:latin typeface="Arial" pitchFamily="34" charset="0"/>
+                <a:ea typeface="Arial" pitchFamily="34" charset="-122"/>
+                <a:cs typeface="Arial" pitchFamily="34" charset="-120"/>
+              </a:rPr>
+              <a:t>Everything from Day 6 (students bring back their own)</a:t>
+            </a:r>
+            <a:endParaRPr lang="en-US" sz="1200" dirty="0"/>
+          </a:p>
+          <a:p>
+            <a:pPr algn="l" marL="342900" indent="-342900">
+              <a:lnSpc>
+                <a:spcPts val="1620"/>
+              </a:lnSpc>
+              <a:spcAft>
+                <a:spcPts val="300"/>
+              </a:spcAft>
+              <a:buSzPct val="100000"/>
+              <a:buChar char="•"/>
+            </a:pPr>
+            <a:r>
+              <a:rPr lang="en-US" sz="1200" dirty="0">
+                <a:solidFill>
+                  <a:srgbClr val="1C2833"/>
+                </a:solidFill>
+                <a:latin typeface="Arial" pitchFamily="34" charset="0"/>
+                <a:ea typeface="Arial" pitchFamily="34" charset="-122"/>
+                <a:cs typeface="Arial" pitchFamily="34" charset="-120"/>
+              </a:rPr>
+              <a:t>Class supply bin</a:t>
+            </a:r>
+            <a:endParaRPr lang="en-US" sz="1200" dirty="0"/>
+          </a:p>
+          <a:p>
+            <a:pPr algn="l" marL="342900" indent="-342900">
+              <a:lnSpc>
+                <a:spcPts val="1620"/>
+              </a:lnSpc>
+              <a:spcAft>
+                <a:spcPts val="300"/>
+              </a:spcAft>
+              <a:buSzPct val="100000"/>
+              <a:buChar char="•"/>
+            </a:pPr>
+            <a:r>
+              <a:rPr lang="en-US" sz="1200" dirty="0">
+                <a:solidFill>
+                  <a:srgbClr val="1C2833"/>
+                </a:solidFill>
+                <a:latin typeface="Arial" pitchFamily="34" charset="0"/>
+                <a:ea typeface="Arial" pitchFamily="34" charset="-122"/>
+                <a:cs typeface="Arial" pitchFamily="34" charset="-120"/>
+              </a:rPr>
+              <a:t>Timer visible</a:t>
+            </a:r>
+            <a:endParaRPr lang="en-US" sz="1200" dirty="0"/>
+          </a:p>
+          <a:p>
+            <a:pPr algn="l" marL="342900" indent="-342900">
+              <a:lnSpc>
+                <a:spcPts val="1620"/>
+              </a:lnSpc>
+              <a:spcAft>
+                <a:spcPts val="300"/>
+              </a:spcAft>
+              <a:buSzPct val="100000"/>
+              <a:buChar char="•"/>
+            </a:pPr>
+            <a:r>
+              <a:rPr lang="en-US" sz="1200" dirty="0">
+                <a:solidFill>
+                  <a:srgbClr val="1C2833"/>
+                </a:solidFill>
+                <a:latin typeface="Arial" pitchFamily="34" charset="0"/>
+                <a:ea typeface="Arial" pitchFamily="34" charset="-122"/>
+                <a:cs typeface="Arial" pitchFamily="34" charset="-120"/>
+              </a:rPr>
+              <a:t>Small "finisher" supplies: laminating pouches (optional), card-binding rings, larger sheets for poster mounting</a:t>
+            </a:r>
+            <a:endParaRPr lang="en-US" sz="1200" dirty="0"/>
+          </a:p>
+        </p:txBody>
+      </p:sp>
+      <p:sp>
+        <p:nvSpPr>
+          <p:cNvPr id="5" name="Text 3"/>
           <p:cNvSpPr/>
           <p:nvPr/>
         </p:nvSpPr>
@@ -4494,7 +6184,7 @@
                 <a:ea typeface="Georgia" pitchFamily="34" charset="-122"/>
                 <a:cs typeface="Georgia" pitchFamily="34" charset="-120"/>
               </a:rPr>
-              <a:t>Warm-up (3 min)</a:t>
+              <a:t>Lesson flow</a:t>
             </a:r>
             <a:endParaRPr lang="en-US" sz="1800" dirty="0"/>
           </a:p>
@@ -4503,146 +6193,6 @@
       <p:sp>
         <p:nvSpPr>
           <p:cNvPr id="4" name="Text 2"/>
-          <p:cNvSpPr/>
-          <p:nvPr/>
-        </p:nvSpPr>
-        <p:spPr>
-          <a:xfrm>
-            <a:off x="406301" y="870942"/>
-            <a:ext cx="8498026" cy="213271"/>
-          </a:xfrm>
-          <a:prstGeom prst="rect">
-            <a:avLst/>
-          </a:prstGeom>
-          <a:noFill/>
-          <a:ln/>
-        </p:spPr>
-        <p:txBody>
-          <a:bodyPr wrap="square" lIns="0" tIns="0" rIns="0" bIns="0" rtlCol="0" anchor="t"/>
-          <a:lstStyle/>
-          <a:p>
-            <a:pPr algn="l" indent="0" marL="0">
-              <a:lnSpc>
-                <a:spcPts val="1680"/>
-              </a:lnSpc>
-              <a:spcBef>
-                <a:spcPts val="300"/>
-              </a:spcBef>
-              <a:spcAft>
-                <a:spcPts val="300"/>
-              </a:spcAft>
-              <a:buNone/>
-            </a:pPr>
-            <a:r>
-              <a:rPr lang="en-US" sz="1200" dirty="0">
-                <a:solidFill>
-                  <a:srgbClr val="1C2833"/>
-                </a:solidFill>
-                <a:latin typeface="Arial" pitchFamily="34" charset="0"/>
-                <a:ea typeface="Arial" pitchFamily="34" charset="-122"/>
-                <a:cs typeface="Arial" pitchFamily="34" charset="-120"/>
-              </a:rPr>
-              <a:t>– Daily prompt: </a:t>
-            </a:r>
-            <a:pPr algn="l" indent="0" marL="0">
-              <a:lnSpc>
-                <a:spcPts val="1680"/>
-              </a:lnSpc>
-              <a:spcBef>
-                <a:spcPts val="300"/>
-              </a:spcBef>
-              <a:spcAft>
-                <a:spcPts val="300"/>
-              </a:spcAft>
-              <a:buNone/>
-            </a:pPr>
-            <a:r>
-              <a:rPr lang="en-US" sz="1200" i="1" dirty="0">
-                <a:solidFill>
-                  <a:srgbClr val="1C2833"/>
-                </a:solidFill>
-                <a:latin typeface="Arial" pitchFamily="34" charset="0"/>
-                <a:ea typeface="Arial" pitchFamily="34" charset="-122"/>
-                <a:cs typeface="Arial" pitchFamily="34" charset="-120"/>
-              </a:rPr>
-              <a:t>"In one sentence — what's the last thing your artefact needs?"</a:t>
-            </a:r>
-            <a:pPr algn="l" indent="0" marL="0">
-              <a:lnSpc>
-                <a:spcPts val="1680"/>
-              </a:lnSpc>
-              <a:spcBef>
-                <a:spcPts val="300"/>
-              </a:spcBef>
-              <a:spcAft>
-                <a:spcPts val="300"/>
-              </a:spcAft>
-              <a:buNone/>
-            </a:pPr>
-            <a:r>
-              <a:rPr lang="en-US" sz="1200" dirty="0">
-                <a:solidFill>
-                  <a:srgbClr val="1C2833"/>
-                </a:solidFill>
-                <a:latin typeface="Arial" pitchFamily="34" charset="0"/>
-                <a:ea typeface="Arial" pitchFamily="34" charset="-122"/>
-                <a:cs typeface="Arial" pitchFamily="34" charset="-120"/>
-              </a:rPr>
-              <a:t> 3 students share.</a:t>
-            </a:r>
-            <a:endParaRPr lang="en-US" sz="1200" dirty="0"/>
-          </a:p>
-        </p:txBody>
-      </p:sp>
-      <p:sp>
-        <p:nvSpPr>
-          <p:cNvPr id="5" name="Text 3"/>
-          <p:cNvSpPr/>
-          <p:nvPr/>
-        </p:nvSpPr>
-        <p:spPr>
-          <a:xfrm>
-            <a:off x="634901" y="1173063"/>
-            <a:ext cx="8102798" cy="487561"/>
-          </a:xfrm>
-          <a:prstGeom prst="rect">
-            <a:avLst/>
-          </a:prstGeom>
-          <a:noFill/>
-          <a:ln/>
-        </p:spPr>
-        <p:txBody>
-          <a:bodyPr wrap="square" lIns="0" tIns="0" rIns="0" bIns="0" rtlCol="0" anchor="t"/>
-          <a:lstStyle/>
-          <a:p>
-            <a:pPr algn="l" marL="342900" indent="-342900">
-              <a:lnSpc>
-                <a:spcPts val="1620"/>
-              </a:lnSpc>
-              <a:spcAft>
-                <a:spcPts val="300"/>
-              </a:spcAft>
-              <a:buSzPct val="100000"/>
-              <a:buChar char="•"/>
-            </a:pPr>
-            <a:r>
-              <a:rPr lang="en-US" sz="1200" i="1" dirty="0">
-                <a:solidFill>
-                  <a:srgbClr val="1C2833"/>
-                </a:solidFill>
-                <a:latin typeface="Arial" pitchFamily="34" charset="0"/>
-                <a:ea typeface="Arial" pitchFamily="34" charset="-122"/>
-                <a:cs typeface="Arial" pitchFamily="34" charset="-120"/>
-              </a:rPr>
-              <a:t>"Today is the second build day. You should finish 80% by the end. If you're at 30% now, we have a problem to solve in the next 5 minutes — come see me."</a:t>
-            </a:r>
-            <a:endParaRPr lang="en-US" sz="1200" dirty="0"/>
-          </a:p>
-        </p:txBody>
-      </p:sp>
-      <p:sp>
-        <p:nvSpPr>
-          <p:cNvPr id="6" name="Text 4"/>
           <p:cNvSpPr/>
           <p:nvPr/>
         </p:nvSpPr>
@@ -4792,7 +6342,7 @@
                 <a:ea typeface="Georgia" pitchFamily="34" charset="-122"/>
                 <a:cs typeface="Georgia" pitchFamily="34" charset="-120"/>
               </a:rPr>
-              <a:t>Core / Activity (35 min) — Quiet build, continued</a:t>
+              <a:t>Warm-up (3 min)</a:t>
             </a:r>
             <a:endParaRPr lang="en-US" sz="1800" dirty="0"/>
           </a:p>
@@ -4806,8 +6356,8 @@
         </p:nvSpPr>
         <p:spPr>
           <a:xfrm>
-            <a:off x="406301" y="870942"/>
-            <a:ext cx="8498026" cy="213271"/>
+            <a:off x="634901" y="883593"/>
+            <a:ext cx="8102798" cy="731341"/>
           </a:xfrm>
           <a:prstGeom prst="rect">
             <a:avLst/>
@@ -4819,17 +6369,15 @@
           <a:bodyPr wrap="square" lIns="0" tIns="0" rIns="0" bIns="0" rtlCol="0" anchor="t"/>
           <a:lstStyle/>
           <a:p>
-            <a:pPr algn="l" indent="0" marL="0">
-              <a:lnSpc>
-                <a:spcPts val="1680"/>
-              </a:lnSpc>
-              <a:spcBef>
-                <a:spcPts val="300"/>
-              </a:spcBef>
-              <a:spcAft>
-                <a:spcPts val="300"/>
-              </a:spcAft>
-              <a:buNone/>
+            <a:pPr algn="l" marL="342900" indent="-342900">
+              <a:lnSpc>
+                <a:spcPts val="1620"/>
+              </a:lnSpc>
+              <a:spcAft>
+                <a:spcPts val="300"/>
+              </a:spcAft>
+              <a:buSzPct val="100000"/>
+              <a:buChar char="•"/>
             </a:pPr>
             <a:r>
               <a:rPr lang="en-US" sz="1200" dirty="0">
@@ -4840,63 +6388,79 @@
                 <a:ea typeface="Arial" pitchFamily="34" charset="-122"/>
                 <a:cs typeface="Arial" pitchFamily="34" charset="-120"/>
               </a:rPr>
-              <a:t>Same protocol as Day 6:</a:t>
+              <a:t>Daily prompt: </a:t>
+            </a:r>
+            <a:pPr algn="l" indent="0" marL="0">
+              <a:lnSpc>
+                <a:spcPts val="1620"/>
+              </a:lnSpc>
+              <a:spcAft>
+                <a:spcPts val="300"/>
+              </a:spcAft>
+              <a:buNone/>
+            </a:pPr>
+            <a:r>
+              <a:rPr lang="en-US" sz="1200" i="1" dirty="0">
+                <a:solidFill>
+                  <a:srgbClr val="1C2833"/>
+                </a:solidFill>
+                <a:latin typeface="Arial" pitchFamily="34" charset="0"/>
+                <a:ea typeface="Arial" pitchFamily="34" charset="-122"/>
+                <a:cs typeface="Arial" pitchFamily="34" charset="-120"/>
+              </a:rPr>
+              <a:t>"In one sentence — what's the last thing your artefact needs?"</a:t>
+            </a:r>
+            <a:pPr algn="l" indent="0" marL="0">
+              <a:lnSpc>
+                <a:spcPts val="1620"/>
+              </a:lnSpc>
+              <a:spcAft>
+                <a:spcPts val="300"/>
+              </a:spcAft>
+              <a:buNone/>
+            </a:pPr>
+            <a:r>
+              <a:rPr lang="en-US" sz="1200" dirty="0">
+                <a:solidFill>
+                  <a:srgbClr val="1C2833"/>
+                </a:solidFill>
+                <a:latin typeface="Arial" pitchFamily="34" charset="0"/>
+                <a:ea typeface="Arial" pitchFamily="34" charset="-122"/>
+                <a:cs typeface="Arial" pitchFamily="34" charset="-120"/>
+              </a:rPr>
+              <a:t> 3 students share.</a:t>
             </a:r>
             <a:endParaRPr lang="en-US" sz="1200" dirty="0"/>
           </a:p>
+          <a:p>
+            <a:pPr algn="l" marL="342900" indent="-342900">
+              <a:lnSpc>
+                <a:spcPts val="1620"/>
+              </a:lnSpc>
+              <a:spcAft>
+                <a:spcPts val="300"/>
+              </a:spcAft>
+              <a:buSzPct val="100000"/>
+              <a:buChar char="•"/>
+            </a:pPr>
+            <a:r>
+              <a:rPr lang="en-US" sz="1200" i="1" dirty="0">
+                <a:solidFill>
+                  <a:srgbClr val="1C2833"/>
+                </a:solidFill>
+                <a:latin typeface="Arial" pitchFamily="34" charset="0"/>
+                <a:ea typeface="Arial" pitchFamily="34" charset="-122"/>
+                <a:cs typeface="Arial" pitchFamily="34" charset="-120"/>
+              </a:rPr>
+              <a:t>"Today is the second build day. You should finish 80% by the end. If you're at 30% now, we have a problem to solve in the next 5 minutes — come see me."</a:t>
+            </a:r>
+            <a:endParaRPr lang="en-US" sz="1200" dirty="0"/>
+          </a:p>
         </p:txBody>
       </p:sp>
       <p:sp>
         <p:nvSpPr>
           <p:cNvPr id="5" name="Text 3"/>
-          <p:cNvSpPr/>
-          <p:nvPr/>
-        </p:nvSpPr>
-        <p:spPr>
-          <a:xfrm>
-            <a:off x="406301" y="1160413"/>
-            <a:ext cx="8498026" cy="426541"/>
-          </a:xfrm>
-          <a:prstGeom prst="rect">
-            <a:avLst/>
-          </a:prstGeom>
-          <a:noFill/>
-          <a:ln/>
-        </p:spPr>
-        <p:txBody>
-          <a:bodyPr wrap="square" lIns="0" tIns="0" rIns="0" bIns="0" rtlCol="0" anchor="t"/>
-          <a:lstStyle/>
-          <a:p>
-            <a:pPr algn="l" indent="0" marL="0">
-              <a:lnSpc>
-                <a:spcPts val="1680"/>
-              </a:lnSpc>
-              <a:spcBef>
-                <a:spcPts val="300"/>
-              </a:spcBef>
-              <a:spcAft>
-                <a:spcPts val="300"/>
-              </a:spcAft>
-              <a:buNone/>
-            </a:pPr>
-            <a:r>
-              <a:rPr lang="en-US" sz="1200" dirty="0">
-                <a:solidFill>
-                  <a:srgbClr val="1C2833"/>
-                </a:solidFill>
-                <a:latin typeface="Arial" pitchFamily="34" charset="0"/>
-                <a:ea typeface="Arial" pitchFamily="34" charset="-122"/>
-                <a:cs typeface="Arial" pitchFamily="34" charset="-120"/>
-              </a:rPr>
-              <a:t>– Teacher walks the room. Unblocker / narrower / witness. – 18-minute mid-session check: hands up if 80% complete by end of class. – A short queue for the "finisher" station — students who are ready can laminate, bind, or mount.</a:t>
-            </a:r>
-            <a:endParaRPr lang="en-US" sz="1200" dirty="0"/>
-          </a:p>
-        </p:txBody>
-      </p:sp>
-      <p:sp>
-        <p:nvSpPr>
-          <p:cNvPr id="6" name="Text 4"/>
           <p:cNvSpPr/>
           <p:nvPr/>
         </p:nvSpPr>
@@ -5046,7 +6610,7 @@
                 <a:ea typeface="Georgia" pitchFamily="34" charset="-122"/>
                 <a:cs typeface="Georgia" pitchFamily="34" charset="-120"/>
               </a:rPr>
-              <a:t>The Day 7 cut-line</a:t>
+              <a:t>Core / Activity (35 min) — Quiet build, continued</a:t>
             </a:r>
             <a:endParaRPr lang="en-US" sz="1800" dirty="0"/>
           </a:p>
@@ -5094,53 +6658,7 @@
                 <a:ea typeface="Arial" pitchFamily="34" charset="-122"/>
                 <a:cs typeface="Arial" pitchFamily="34" charset="-120"/>
               </a:rPr>
-              <a:t>If at the 18-minute check a student is below 50% complete, </a:t>
-            </a:r>
-            <a:pPr algn="l" indent="0" marL="0">
-              <a:lnSpc>
-                <a:spcPts val="1680"/>
-              </a:lnSpc>
-              <a:spcBef>
-                <a:spcPts val="300"/>
-              </a:spcBef>
-              <a:spcAft>
-                <a:spcPts val="300"/>
-              </a:spcAft>
-              <a:buNone/>
-            </a:pPr>
-            <a:r>
-              <a:rPr lang="en-US" sz="1200" b="1" dirty="0">
-                <a:solidFill>
-                  <a:srgbClr val="1C2833"/>
-                </a:solidFill>
-                <a:latin typeface="Arial" pitchFamily="34" charset="0"/>
-                <a:ea typeface="Arial" pitchFamily="34" charset="-122"/>
-                <a:cs typeface="Arial" pitchFamily="34" charset="-120"/>
-              </a:rPr>
-              <a:t>cut something</a:t>
-            </a:r>
-            <a:pPr algn="l" indent="0" marL="0">
-              <a:lnSpc>
-                <a:spcPts val="1680"/>
-              </a:lnSpc>
-              <a:spcBef>
-                <a:spcPts val="300"/>
-              </a:spcBef>
-              <a:spcAft>
-                <a:spcPts val="300"/>
-              </a:spcAft>
-              <a:buNone/>
-            </a:pPr>
-            <a:r>
-              <a:rPr lang="en-US" sz="1200" dirty="0">
-                <a:solidFill>
-                  <a:srgbClr val="1C2833"/>
-                </a:solidFill>
-                <a:latin typeface="Arial" pitchFamily="34" charset="0"/>
-                <a:ea typeface="Arial" pitchFamily="34" charset="-122"/>
-                <a:cs typeface="Arial" pitchFamily="34" charset="-120"/>
-              </a:rPr>
-              <a:t>. Sit with the student for 90 seconds:</a:t>
+              <a:t>Same protocol as Day 6:</a:t>
             </a:r>
             <a:endParaRPr lang="en-US" sz="1200" dirty="0"/>
           </a:p>
@@ -5186,7 +6704,7 @@
                 <a:ea typeface="Arial" pitchFamily="34" charset="-122"/>
                 <a:cs typeface="Arial" pitchFamily="34" charset="-120"/>
               </a:rPr>
-              <a:t>What's the smallest version of this artefact that still answers your driving question?</a:t>
+              <a:t>Teacher walks the room. Unblocker / narrower / witness.</a:t>
             </a:r>
             <a:endParaRPr lang="en-US" sz="1200" dirty="0"/>
           </a:p>
@@ -5210,7 +6728,7 @@
                 <a:ea typeface="Arial" pitchFamily="34" charset="-122"/>
                 <a:cs typeface="Arial" pitchFamily="34" charset="-120"/>
               </a:rPr>
-              <a:t>What can come out today, with no penalty, that won't change the answer?</a:t>
+              <a:t>18-minute mid-session check: hands up if 80% complete by end of class.</a:t>
             </a:r>
             <a:endParaRPr lang="en-US" sz="1200" dirty="0"/>
           </a:p>
@@ -5234,7 +6752,7 @@
                 <a:ea typeface="Arial" pitchFamily="34" charset="-122"/>
                 <a:cs typeface="Arial" pitchFamily="34" charset="-120"/>
               </a:rPr>
-              <a:t>Write the cut into your journal — the cut itself becomes part of the reflection.</a:t>
+              <a:t>A short queue for the "finisher" station — students who are ready can laminate, bind, or mount.</a:t>
             </a:r>
             <a:endParaRPr lang="en-US" sz="1200" dirty="0"/>
           </a:p>
@@ -5243,54 +6761,6 @@
       <p:sp>
         <p:nvSpPr>
           <p:cNvPr id="6" name="Text 4"/>
-          <p:cNvSpPr/>
-          <p:nvPr/>
-        </p:nvSpPr>
-        <p:spPr>
-          <a:xfrm>
-            <a:off x="406301" y="2031355"/>
-            <a:ext cx="8498026" cy="213271"/>
-          </a:xfrm>
-          <a:prstGeom prst="rect">
-            <a:avLst/>
-          </a:prstGeom>
-          <a:noFill/>
-          <a:ln/>
-        </p:spPr>
-        <p:txBody>
-          <a:bodyPr wrap="square" lIns="0" tIns="0" rIns="0" bIns="0" rtlCol="0" anchor="t"/>
-          <a:lstStyle/>
-          <a:p>
-            <a:pPr algn="l" indent="0" marL="0">
-              <a:lnSpc>
-                <a:spcPts val="1680"/>
-              </a:lnSpc>
-              <a:spcBef>
-                <a:spcPts val="300"/>
-              </a:spcBef>
-              <a:spcAft>
-                <a:spcPts val="300"/>
-              </a:spcAft>
-              <a:buNone/>
-            </a:pPr>
-            <a:r>
-              <a:rPr lang="en-US" sz="1200" dirty="0">
-                <a:solidFill>
-                  <a:srgbClr val="1C2833"/>
-                </a:solidFill>
-                <a:latin typeface="Arial" pitchFamily="34" charset="0"/>
-                <a:ea typeface="Arial" pitchFamily="34" charset="-122"/>
-                <a:cs typeface="Arial" pitchFamily="34" charset="-120"/>
-              </a:rPr>
-              <a:t>The rubric explicitly rewards finishing a smaller piece over not-finishing a larger one. Make this clear.</a:t>
-            </a:r>
-            <a:endParaRPr lang="en-US" sz="1200" dirty="0"/>
-          </a:p>
-        </p:txBody>
-      </p:sp>
-      <p:sp>
-        <p:nvSpPr>
-          <p:cNvPr id="7" name="Text 5"/>
           <p:cNvSpPr/>
           <p:nvPr/>
         </p:nvSpPr>
@@ -5440,7 +6910,7 @@
                 <a:ea typeface="Georgia" pitchFamily="34" charset="-122"/>
                 <a:cs typeface="Georgia" pitchFamily="34" charset="-120"/>
               </a:rPr>
-              <a:t>Mid-session "Show one thing" (built into the 35 min)</a:t>
+              <a:t>The Day 7 cut-line</a:t>
             </a:r>
             <a:endParaRPr lang="en-US" sz="1800" dirty="0"/>
           </a:p>
@@ -5455,7 +6925,7 @@
         <p:spPr>
           <a:xfrm>
             <a:off x="406301" y="870942"/>
-            <a:ext cx="8498026" cy="426541"/>
+            <a:ext cx="8498026" cy="213271"/>
           </a:xfrm>
           <a:prstGeom prst="rect">
             <a:avLst/>
@@ -5488,7 +6958,7 @@
                 <a:ea typeface="Arial" pitchFamily="34" charset="-122"/>
                 <a:cs typeface="Arial" pitchFamily="34" charset="-120"/>
               </a:rPr>
-              <a:t>– At the 25-minute mark, every student holds up </a:t>
+              <a:t>If at the 18-minute check a student is below 50% complete, </a:t>
             </a:r>
             <a:pPr algn="l" indent="0" marL="0">
               <a:lnSpc>
@@ -5511,7 +6981,7 @@
                 <a:ea typeface="Arial" pitchFamily="34" charset="-122"/>
                 <a:cs typeface="Arial" pitchFamily="34" charset="-120"/>
               </a:rPr>
-              <a:t>one thing they made today</a:t>
+              <a:t>cut something</a:t>
             </a:r>
             <a:pPr algn="l" indent="0" marL="0">
               <a:lnSpc>
@@ -5534,7 +7004,7 @@
                 <a:ea typeface="Arial" pitchFamily="34" charset="-122"/>
                 <a:cs typeface="Arial" pitchFamily="34" charset="-120"/>
               </a:rPr>
-              <a:t> for the room to see for 5 seconds. No commentary. Just a silent gallery flash. (This generates collective momentum for the last 10 minutes.)</a:t>
+              <a:t>. Sit with the student for 90 seconds:</a:t>
             </a:r>
             <a:endParaRPr lang="en-US" sz="1200" dirty="0"/>
           </a:p>
@@ -5543,6 +7013,100 @@
       <p:sp>
         <p:nvSpPr>
           <p:cNvPr id="5" name="Text 3"/>
+          <p:cNvSpPr/>
+          <p:nvPr/>
+        </p:nvSpPr>
+        <p:spPr>
+          <a:xfrm>
+            <a:off x="634901" y="1173063"/>
+            <a:ext cx="8102798" cy="769441"/>
+          </a:xfrm>
+          <a:prstGeom prst="rect">
+            <a:avLst/>
+          </a:prstGeom>
+          <a:noFill/>
+          <a:ln/>
+        </p:spPr>
+        <p:txBody>
+          <a:bodyPr wrap="square" lIns="0" tIns="0" rIns="0" bIns="0" rtlCol="0" anchor="t"/>
+          <a:lstStyle/>
+          <a:p>
+            <a:pPr algn="l" marL="342900" indent="-342900">
+              <a:lnSpc>
+                <a:spcPts val="1620"/>
+              </a:lnSpc>
+              <a:spcAft>
+                <a:spcPts val="300"/>
+              </a:spcAft>
+              <a:buSzPct val="100000"/>
+              <a:buChar char="•"/>
+            </a:pPr>
+            <a:r>
+              <a:rPr lang="en-US" sz="1200" dirty="0">
+                <a:solidFill>
+                  <a:srgbClr val="1C2833"/>
+                </a:solidFill>
+                <a:latin typeface="Arial" pitchFamily="34" charset="0"/>
+                <a:ea typeface="Arial" pitchFamily="34" charset="-122"/>
+                <a:cs typeface="Arial" pitchFamily="34" charset="-120"/>
+              </a:rPr>
+              <a:t>What's the smallest version of this artefact that still answers your driving question?</a:t>
+            </a:r>
+            <a:endParaRPr lang="en-US" sz="1200" dirty="0"/>
+          </a:p>
+          <a:p>
+            <a:pPr algn="l" marL="342900" indent="-342900">
+              <a:lnSpc>
+                <a:spcPts val="1620"/>
+              </a:lnSpc>
+              <a:spcAft>
+                <a:spcPts val="300"/>
+              </a:spcAft>
+              <a:buSzPct val="100000"/>
+              <a:buChar char="•"/>
+            </a:pPr>
+            <a:r>
+              <a:rPr lang="en-US" sz="1200" dirty="0">
+                <a:solidFill>
+                  <a:srgbClr val="1C2833"/>
+                </a:solidFill>
+                <a:latin typeface="Arial" pitchFamily="34" charset="0"/>
+                <a:ea typeface="Arial" pitchFamily="34" charset="-122"/>
+                <a:cs typeface="Arial" pitchFamily="34" charset="-120"/>
+              </a:rPr>
+              <a:t>What can come out today, with no penalty, that won't change the answer?</a:t>
+            </a:r>
+            <a:endParaRPr lang="en-US" sz="1200" dirty="0"/>
+          </a:p>
+          <a:p>
+            <a:pPr algn="l" marL="342900" indent="-342900">
+              <a:lnSpc>
+                <a:spcPts val="1620"/>
+              </a:lnSpc>
+              <a:spcAft>
+                <a:spcPts val="300"/>
+              </a:spcAft>
+              <a:buSzPct val="100000"/>
+              <a:buChar char="•"/>
+            </a:pPr>
+            <a:r>
+              <a:rPr lang="en-US" sz="1200" dirty="0">
+                <a:solidFill>
+                  <a:srgbClr val="1C2833"/>
+                </a:solidFill>
+                <a:latin typeface="Arial" pitchFamily="34" charset="0"/>
+                <a:ea typeface="Arial" pitchFamily="34" charset="-122"/>
+                <a:cs typeface="Arial" pitchFamily="34" charset="-120"/>
+              </a:rPr>
+              <a:t>Write the cut into your journal — the cut itself becomes part of the reflection.</a:t>
+            </a:r>
+            <a:endParaRPr lang="en-US" sz="1200" dirty="0"/>
+          </a:p>
+        </p:txBody>
+      </p:sp>
+      <p:sp>
+        <p:nvSpPr>
+          <p:cNvPr id="6" name="Text 4"/>
           <p:cNvSpPr/>
           <p:nvPr/>
         </p:nvSpPr>
@@ -5692,7 +7256,7 @@
                 <a:ea typeface="Georgia" pitchFamily="34" charset="-122"/>
                 <a:cs typeface="Georgia" pitchFamily="34" charset="-120"/>
               </a:rPr>
-              <a:t>Wrap-up (7 min)</a:t>
+              <a:t>The Day 7 cut-line (cont.)</a:t>
             </a:r>
             <a:endParaRPr lang="en-US" sz="1800" dirty="0"/>
           </a:p>
@@ -5707,7 +7271,7 @@
         <p:spPr>
           <a:xfrm>
             <a:off x="406301" y="870942"/>
-            <a:ext cx="8498026" cy="426541"/>
+            <a:ext cx="8498026" cy="213271"/>
           </a:xfrm>
           <a:prstGeom prst="rect">
             <a:avLst/>
@@ -5740,7 +7304,7 @@
                 <a:ea typeface="Arial" pitchFamily="34" charset="-122"/>
                 <a:cs typeface="Arial" pitchFamily="34" charset="-120"/>
               </a:rPr>
-              <a:t>– 4 minutes — pack up, photograph today's progress. – 3 minutes — daily journal:   &gt; "My artefact is now ___% complete. What I still need to do for documentation (Day 8): ___ . What I cut today, if anything: ___ ." – Submit journals.</a:t>
+              <a:t>The rubric explicitly rewards finishing a smaller piece over not-finishing a larger one. Make this clear.</a:t>
             </a:r>
             <a:endParaRPr lang="en-US" sz="1200" dirty="0"/>
           </a:p>
@@ -5898,7 +7462,7 @@
                 <a:ea typeface="Georgia" pitchFamily="34" charset="-122"/>
                 <a:cs typeface="Georgia" pitchFamily="34" charset="-120"/>
               </a:rPr>
-              <a:t>Student-facing content</a:t>
+              <a:t>Mid-session "Show one thing" (built into the 35 min)</a:t>
             </a:r>
             <a:endParaRPr lang="en-US" sz="1800" dirty="0"/>
           </a:p>
@@ -5912,340 +7476,87 @@
         </p:nvSpPr>
         <p:spPr>
           <a:xfrm>
-            <a:off x="406301" y="883593"/>
-            <a:ext cx="8331398" cy="2381250"/>
-          </a:xfrm>
-          <a:prstGeom prst="rect">
-            <a:avLst/>
-          </a:prstGeom>
-          <a:solidFill>
-            <a:srgbClr val="F4F8F9"/>
-          </a:solidFill>
-          <a:ln/>
-        </p:spPr>
-        <p:txBody>
-          <a:bodyPr wrap="square" rtlCol="0" anchor="ctr"/>
-          <a:lstStyle/>
-          <a:p>
-            <a:pPr indent="0" marL="0">
-              <a:buNone/>
-            </a:pPr>
-            <a:endParaRPr lang="en-US" dirty="0"/>
-          </a:p>
-        </p:txBody>
-      </p:sp>
-      <p:sp>
-        <p:nvSpPr>
-          <p:cNvPr id="5" name="Shape 3"/>
-          <p:cNvSpPr/>
-          <p:nvPr/>
-        </p:nvSpPr>
-        <p:spPr>
-          <a:xfrm>
-            <a:off x="434876" y="883593"/>
-            <a:ext cx="0" cy="2381250"/>
-          </a:xfrm>
-          <a:prstGeom prst="line">
+            <a:off x="634901" y="883593"/>
+            <a:ext cx="8102798" cy="487561"/>
+          </a:xfrm>
+          <a:prstGeom prst="rect">
             <a:avLst/>
           </a:prstGeom>
           <a:noFill/>
-          <a:ln w="57150">
-            <a:solidFill>
-              <a:srgbClr val="FE4447"/>
-            </a:solidFill>
-            <a:prstDash val="solid"/>
-          </a:ln>
-        </p:spPr>
-      </p:sp>
-      <p:sp>
-        <p:nvSpPr>
-          <p:cNvPr id="6" name="Text 4"/>
-          <p:cNvSpPr/>
-          <p:nvPr/>
-        </p:nvSpPr>
-        <p:spPr>
-          <a:xfrm>
-            <a:off x="692051" y="1074093"/>
-            <a:ext cx="7973389" cy="230981"/>
-          </a:xfrm>
-          <a:prstGeom prst="rect">
-            <a:avLst/>
-          </a:prstGeom>
-          <a:noFill/>
           <a:ln/>
         </p:spPr>
         <p:txBody>
           <a:bodyPr wrap="square" lIns="0" tIns="0" rIns="0" bIns="0" rtlCol="0" anchor="t"/>
           <a:lstStyle/>
           <a:p>
-            <a:pPr algn="l" indent="0" marL="0">
-              <a:lnSpc>
-                <a:spcPts val="1820"/>
-              </a:lnSpc>
-              <a:spcBef>
-                <a:spcPts val="300"/>
-              </a:spcBef>
-              <a:spcAft>
-                <a:spcPts val="300"/>
-              </a:spcAft>
-              <a:buNone/>
-            </a:pPr>
-            <a:r>
-              <a:rPr lang="en-US" sz="1300" b="1" i="1" dirty="0">
-                <a:solidFill>
-                  <a:srgbClr val="1C2833"/>
-                </a:solidFill>
-                <a:latin typeface="Georgia" pitchFamily="34" charset="0"/>
-                <a:ea typeface="Georgia" pitchFamily="34" charset="-122"/>
-                <a:cs typeface="Georgia" pitchFamily="34" charset="-120"/>
-              </a:rPr>
-              <a:t>Day 7. You finish 80% today.</a:t>
-            </a:r>
-            <a:endParaRPr lang="en-US" sz="1300" dirty="0"/>
-          </a:p>
-        </p:txBody>
-      </p:sp>
-      <p:sp>
-        <p:nvSpPr>
-          <p:cNvPr id="7" name="Text 5"/>
-          <p:cNvSpPr/>
-          <p:nvPr/>
-        </p:nvSpPr>
-        <p:spPr>
-          <a:xfrm>
-            <a:off x="692051" y="1343174"/>
-            <a:ext cx="7973389" cy="230981"/>
-          </a:xfrm>
-          <a:prstGeom prst="rect">
-            <a:avLst/>
-          </a:prstGeom>
-          <a:noFill/>
-          <a:ln/>
-        </p:spPr>
-        <p:txBody>
-          <a:bodyPr wrap="square" lIns="0" tIns="0" rIns="0" bIns="0" rtlCol="0" anchor="t"/>
-          <a:lstStyle/>
-          <a:p>
-            <a:pPr algn="l" indent="0" marL="0">
-              <a:lnSpc>
-                <a:spcPts val="1820"/>
-              </a:lnSpc>
-              <a:spcBef>
-                <a:spcPts val="300"/>
-              </a:spcBef>
-              <a:spcAft>
-                <a:spcPts val="300"/>
-              </a:spcAft>
-              <a:buNone/>
-            </a:pPr>
-            <a:r>
-              <a:rPr lang="en-US" sz="1300" i="1" dirty="0">
-                <a:solidFill>
-                  <a:srgbClr val="1C2833"/>
-                </a:solidFill>
-                <a:latin typeface="Georgia" pitchFamily="34" charset="0"/>
-                <a:ea typeface="Georgia" pitchFamily="34" charset="-122"/>
-                <a:cs typeface="Georgia" pitchFamily="34" charset="-120"/>
-              </a:rPr>
-              <a:t>Same protocol as yesterday — quiet, focused, no new teaching.</a:t>
-            </a:r>
-            <a:endParaRPr lang="en-US" sz="1300" dirty="0"/>
-          </a:p>
-        </p:txBody>
-      </p:sp>
-      <p:sp>
-        <p:nvSpPr>
-          <p:cNvPr id="8" name="Text 6"/>
-          <p:cNvSpPr/>
-          <p:nvPr/>
-        </p:nvSpPr>
-        <p:spPr>
-          <a:xfrm>
-            <a:off x="692051" y="1612255"/>
-            <a:ext cx="7973389" cy="692944"/>
-          </a:xfrm>
-          <a:prstGeom prst="rect">
-            <a:avLst/>
-          </a:prstGeom>
-          <a:noFill/>
-          <a:ln/>
-        </p:spPr>
-        <p:txBody>
-          <a:bodyPr wrap="square" lIns="0" tIns="0" rIns="0" bIns="0" rtlCol="0" anchor="t"/>
-          <a:lstStyle/>
-          <a:p>
-            <a:pPr algn="l" indent="0" marL="0">
-              <a:lnSpc>
-                <a:spcPts val="1820"/>
-              </a:lnSpc>
-              <a:spcBef>
-                <a:spcPts val="300"/>
-              </a:spcBef>
-              <a:spcAft>
-                <a:spcPts val="300"/>
-              </a:spcAft>
-              <a:buNone/>
-            </a:pPr>
-            <a:r>
-              <a:rPr lang="en-US" sz="1300" dirty="0">
-                <a:solidFill>
-                  <a:srgbClr val="1C2833"/>
-                </a:solidFill>
-                <a:latin typeface="Georgia" pitchFamily="34" charset="0"/>
-                <a:ea typeface="Georgia" pitchFamily="34" charset="-122"/>
-                <a:cs typeface="Georgia" pitchFamily="34" charset="-120"/>
-              </a:rPr>
-              <a:t>Mid-session check: hands up if 80% will be done by the bell. If your hand goes down, come see me. We will cut something. </a:t>
-            </a:r>
-            <a:pPr algn="l" indent="0" marL="0">
-              <a:lnSpc>
-                <a:spcPts val="1820"/>
-              </a:lnSpc>
-              <a:spcBef>
-                <a:spcPts val="300"/>
-              </a:spcBef>
-              <a:spcAft>
-                <a:spcPts val="300"/>
-              </a:spcAft>
-              <a:buNone/>
-            </a:pPr>
-            <a:r>
-              <a:rPr lang="en-US" sz="1300" b="1" i="1" dirty="0">
-                <a:solidFill>
-                  <a:srgbClr val="1C2833"/>
-                </a:solidFill>
-                <a:latin typeface="Georgia" pitchFamily="34" charset="0"/>
-                <a:ea typeface="Georgia" pitchFamily="34" charset="-122"/>
-                <a:cs typeface="Georgia" pitchFamily="34" charset="-120"/>
-              </a:rPr>
-              <a:t>Cutting is fine.</a:t>
-            </a:r>
-            <a:pPr algn="l" indent="0" marL="0">
-              <a:lnSpc>
-                <a:spcPts val="1820"/>
-              </a:lnSpc>
-              <a:spcBef>
-                <a:spcPts val="300"/>
-              </a:spcBef>
-              <a:spcAft>
-                <a:spcPts val="300"/>
-              </a:spcAft>
-              <a:buNone/>
-            </a:pPr>
-            <a:r>
-              <a:rPr lang="en-US" sz="1300" dirty="0">
-                <a:solidFill>
-                  <a:srgbClr val="1C2833"/>
-                </a:solidFill>
-                <a:latin typeface="Georgia" pitchFamily="34" charset="0"/>
-                <a:ea typeface="Georgia" pitchFamily="34" charset="-122"/>
-                <a:cs typeface="Georgia" pitchFamily="34" charset="-120"/>
-              </a:rPr>
-              <a:t> The rubric rewards a finished small thing over an unfinished big thing.</a:t>
-            </a:r>
-            <a:endParaRPr lang="en-US" sz="1300" dirty="0"/>
-          </a:p>
-        </p:txBody>
-      </p:sp>
-      <p:sp>
-        <p:nvSpPr>
-          <p:cNvPr id="9" name="Text 7"/>
-          <p:cNvSpPr/>
-          <p:nvPr/>
-        </p:nvSpPr>
-        <p:spPr>
-          <a:xfrm>
-            <a:off x="692051" y="2343299"/>
-            <a:ext cx="7973389" cy="461963"/>
-          </a:xfrm>
-          <a:prstGeom prst="rect">
-            <a:avLst/>
-          </a:prstGeom>
-          <a:noFill/>
-          <a:ln/>
-        </p:spPr>
-        <p:txBody>
-          <a:bodyPr wrap="square" lIns="0" tIns="0" rIns="0" bIns="0" rtlCol="0" anchor="t"/>
-          <a:lstStyle/>
-          <a:p>
-            <a:pPr algn="l" indent="0" marL="0">
-              <a:lnSpc>
-                <a:spcPts val="1820"/>
-              </a:lnSpc>
-              <a:spcBef>
-                <a:spcPts val="300"/>
-              </a:spcBef>
-              <a:spcAft>
-                <a:spcPts val="300"/>
-              </a:spcAft>
-              <a:buNone/>
-            </a:pPr>
-            <a:r>
-              <a:rPr lang="en-US" sz="1300" i="1" dirty="0">
-                <a:solidFill>
-                  <a:srgbClr val="1C2833"/>
-                </a:solidFill>
-                <a:latin typeface="Georgia" pitchFamily="34" charset="0"/>
-                <a:ea typeface="Georgia" pitchFamily="34" charset="-122"/>
-                <a:cs typeface="Georgia" pitchFamily="34" charset="-120"/>
-              </a:rPr>
-              <a:t>At the 25-minute mark, everyone holds up one thing they made today for the room to see. Five seconds, silent. Then back to work.</a:t>
-            </a:r>
-            <a:endParaRPr lang="en-US" sz="1300" dirty="0"/>
-          </a:p>
-        </p:txBody>
-      </p:sp>
-      <p:sp>
-        <p:nvSpPr>
-          <p:cNvPr id="10" name="Text 8"/>
-          <p:cNvSpPr/>
-          <p:nvPr/>
-        </p:nvSpPr>
-        <p:spPr>
-          <a:xfrm>
-            <a:off x="692051" y="2843361"/>
-            <a:ext cx="7973389" cy="230981"/>
-          </a:xfrm>
-          <a:prstGeom prst="rect">
-            <a:avLst/>
-          </a:prstGeom>
-          <a:noFill/>
-          <a:ln/>
-        </p:spPr>
-        <p:txBody>
-          <a:bodyPr wrap="square" lIns="0" tIns="0" rIns="0" bIns="0" rtlCol="0" anchor="t"/>
-          <a:lstStyle/>
-          <a:p>
-            <a:pPr algn="l" indent="0" marL="0">
-              <a:lnSpc>
-                <a:spcPts val="1820"/>
-              </a:lnSpc>
-              <a:spcBef>
-                <a:spcPts val="300"/>
-              </a:spcBef>
-              <a:spcAft>
-                <a:spcPts val="300"/>
-              </a:spcAft>
-              <a:buNone/>
-            </a:pPr>
-            <a:r>
-              <a:rPr lang="en-US" sz="1300" i="1" dirty="0">
-                <a:solidFill>
-                  <a:srgbClr val="1C2833"/>
-                </a:solidFill>
-                <a:latin typeface="Georgia" pitchFamily="34" charset="0"/>
-                <a:ea typeface="Georgia" pitchFamily="34" charset="-122"/>
-                <a:cs typeface="Georgia" pitchFamily="34" charset="-120"/>
-              </a:rPr>
-              <a:t>By end of class — your artefact is 80% complete. Tomorrow you write it up.</a:t>
-            </a:r>
-            <a:endParaRPr lang="en-US" sz="1300" dirty="0"/>
-          </a:p>
-        </p:txBody>
-      </p:sp>
-      <p:sp>
-        <p:nvSpPr>
-          <p:cNvPr id="11" name="Text 9"/>
+            <a:pPr algn="l" marL="342900" indent="-342900">
+              <a:lnSpc>
+                <a:spcPts val="1620"/>
+              </a:lnSpc>
+              <a:spcAft>
+                <a:spcPts val="300"/>
+              </a:spcAft>
+              <a:buSzPct val="100000"/>
+              <a:buChar char="•"/>
+            </a:pPr>
+            <a:r>
+              <a:rPr lang="en-US" sz="1200" dirty="0">
+                <a:solidFill>
+                  <a:srgbClr val="1C2833"/>
+                </a:solidFill>
+                <a:latin typeface="Arial" pitchFamily="34" charset="0"/>
+                <a:ea typeface="Arial" pitchFamily="34" charset="-122"/>
+                <a:cs typeface="Arial" pitchFamily="34" charset="-120"/>
+              </a:rPr>
+              <a:t>At the 25-minute mark, every student holds up </a:t>
+            </a:r>
+            <a:pPr algn="l" indent="0" marL="0">
+              <a:lnSpc>
+                <a:spcPts val="1620"/>
+              </a:lnSpc>
+              <a:spcAft>
+                <a:spcPts val="300"/>
+              </a:spcAft>
+              <a:buNone/>
+            </a:pPr>
+            <a:r>
+              <a:rPr lang="en-US" sz="1200" b="1" dirty="0">
+                <a:solidFill>
+                  <a:srgbClr val="1C2833"/>
+                </a:solidFill>
+                <a:latin typeface="Arial" pitchFamily="34" charset="0"/>
+                <a:ea typeface="Arial" pitchFamily="34" charset="-122"/>
+                <a:cs typeface="Arial" pitchFamily="34" charset="-120"/>
+              </a:rPr>
+              <a:t>one thing they made today</a:t>
+            </a:r>
+            <a:pPr algn="l" indent="0" marL="0">
+              <a:lnSpc>
+                <a:spcPts val="1620"/>
+              </a:lnSpc>
+              <a:spcAft>
+                <a:spcPts val="300"/>
+              </a:spcAft>
+              <a:buNone/>
+            </a:pPr>
+            <a:r>
+              <a:rPr lang="en-US" sz="1200" dirty="0">
+                <a:solidFill>
+                  <a:srgbClr val="1C2833"/>
+                </a:solidFill>
+                <a:latin typeface="Arial" pitchFamily="34" charset="0"/>
+                <a:ea typeface="Arial" pitchFamily="34" charset="-122"/>
+                <a:cs typeface="Arial" pitchFamily="34" charset="-120"/>
+              </a:rPr>
+              <a:t> for the room to see for 5 seconds. No commentary. Just a silent gallery flash. (This generates collective momentum for the last 10 minutes.)</a:t>
+            </a:r>
+            <a:endParaRPr lang="en-US" sz="1200" dirty="0"/>
+          </a:p>
+        </p:txBody>
+      </p:sp>
+      <p:sp>
+        <p:nvSpPr>
+          <p:cNvPr id="5" name="Text 3"/>
           <p:cNvSpPr/>
           <p:nvPr/>
         </p:nvSpPr>
